--- a/Dq_check+Disaccumulization.pptx
+++ b/Dq_check+Disaccumulization.pptx
@@ -5,7 +5,7 @@
     <p:sldMasterId id="2147483704" r:id="rId1"/>
   </p:sldMasterIdLst>
   <p:notesMasterIdLst>
-    <p:notesMasterId r:id="rId14"/>
+    <p:notesMasterId r:id="rId15"/>
   </p:notesMasterIdLst>
   <p:sldIdLst>
     <p:sldId id="256" r:id="rId2"/>
@@ -20,45 +20,50 @@
     <p:sldId id="356" r:id="rId11"/>
     <p:sldId id="354" r:id="rId12"/>
     <p:sldId id="357" r:id="rId13"/>
+    <p:sldId id="358" r:id="rId14"/>
   </p:sldIdLst>
   <p:sldSz cx="9144000" cy="5143500" type="screen16x9"/>
   <p:notesSz cx="6858000" cy="9144000"/>
   <p:embeddedFontLst>
     <p:embeddedFont>
       <p:font typeface="AlphabetSoup Tilt BT" panose="04020905020B06060204" pitchFamily="82" charset="0"/>
-      <p:regular r:id="rId15"/>
+      <p:regular r:id="rId16"/>
+    </p:embeddedFont>
+    <p:embeddedFont>
+      <p:font typeface="Andalus" panose="02020603050405020304" pitchFamily="18" charset="-78"/>
+      <p:regular r:id="rId17"/>
     </p:embeddedFont>
     <p:embeddedFont>
       <p:font typeface="Crimson Text" panose="020B0604020202020204" charset="0"/>
-      <p:regular r:id="rId16"/>
-      <p:bold r:id="rId17"/>
-      <p:italic r:id="rId18"/>
-      <p:boldItalic r:id="rId19"/>
+      <p:regular r:id="rId18"/>
+      <p:bold r:id="rId19"/>
+      <p:italic r:id="rId20"/>
+      <p:boldItalic r:id="rId21"/>
     </p:embeddedFont>
     <p:embeddedFont>
       <p:font typeface="Lato" panose="020F0502020204030203" pitchFamily="34" charset="0"/>
-      <p:regular r:id="rId20"/>
-      <p:bold r:id="rId21"/>
-      <p:italic r:id="rId22"/>
-      <p:boldItalic r:id="rId23"/>
+      <p:regular r:id="rId22"/>
+      <p:bold r:id="rId23"/>
+      <p:italic r:id="rId24"/>
+      <p:boldItalic r:id="rId25"/>
     </p:embeddedFont>
     <p:embeddedFont>
-      <p:font typeface="Merriweather Light" panose="020F0502020204030204" pitchFamily="2" charset="-52"/>
-      <p:regular r:id="rId24"/>
-      <p:bold r:id="rId25"/>
-      <p:italic r:id="rId26"/>
-      <p:boldItalic r:id="rId27"/>
+      <p:font typeface="Merriweather Light" panose="00000400000000000000" pitchFamily="2" charset="-52"/>
+      <p:regular r:id="rId26"/>
+      <p:bold r:id="rId27"/>
+      <p:italic r:id="rId28"/>
+      <p:boldItalic r:id="rId29"/>
     </p:embeddedFont>
     <p:embeddedFont>
       <p:font typeface="Montserrat" panose="00000500000000000000" pitchFamily="2" charset="-52"/>
-      <p:regular r:id="rId28"/>
-      <p:bold r:id="rId29"/>
-      <p:italic r:id="rId30"/>
-      <p:boldItalic r:id="rId31"/>
+      <p:regular r:id="rId30"/>
+      <p:bold r:id="rId31"/>
+      <p:italic r:id="rId32"/>
+      <p:boldItalic r:id="rId33"/>
     </p:embeddedFont>
     <p:embeddedFont>
       <p:font typeface="Vidaloka" panose="020B0604020202020204" charset="0"/>
-      <p:regular r:id="rId32"/>
+      <p:regular r:id="rId34"/>
     </p:embeddedFont>
   </p:embeddedFontLst>
   <p:defaultTextStyle>
@@ -290,6 +295,11 @@
       </a:defRPr>
     </a:lvl9pPr>
   </p:defaultTextStyle>
+  <p:extLst>
+    <p:ext uri="{EFAFB233-063F-42B5-8137-9DF3F51BA10A}">
+      <p15:sldGuideLst xmlns:p15="http://schemas.microsoft.com/office/powerpoint/2012/main"/>
+    </p:ext>
+  </p:extLst>
 </p:presentation>
 </file>
 
@@ -1210,6 +1220,133 @@
     <p:extLst>
       <p:ext uri="{BB962C8B-B14F-4D97-AF65-F5344CB8AC3E}">
         <p14:creationId xmlns:p14="http://schemas.microsoft.com/office/powerpoint/2010/main" val="2170805335"/>
+      </p:ext>
+    </p:extLst>
+  </p:cSld>
+  <p:clrMapOvr>
+    <a:masterClrMapping/>
+  </p:clrMapOvr>
+</p:notes>
+</file>
+
+<file path=ppt/notesSlides/notesSlide13.xml><?xml version="1.0" encoding="utf-8"?>
+<p:notes xmlns:a="http://schemas.openxmlformats.org/drawingml/2006/main" xmlns:r="http://schemas.openxmlformats.org/officeDocument/2006/relationships" xmlns:p="http://schemas.openxmlformats.org/presentationml/2006/main" showMasterSp="0" showMasterPhAnim="0">
+  <p:cSld>
+    <p:spTree>
+      <p:nvGrpSpPr>
+        <p:cNvPr id="1" name="Shape 880">
+          <a:extLst>
+            <a:ext uri="{FF2B5EF4-FFF2-40B4-BE49-F238E27FC236}">
+              <a16:creationId xmlns:a16="http://schemas.microsoft.com/office/drawing/2014/main" id="{99ABF9C9-47FA-798B-8155-1930FA398AD3}"/>
+            </a:ext>
+          </a:extLst>
+        </p:cNvPr>
+        <p:cNvGrpSpPr/>
+        <p:nvPr/>
+      </p:nvGrpSpPr>
+      <p:grpSpPr>
+        <a:xfrm>
+          <a:off x="0" y="0"/>
+          <a:ext cx="0" cy="0"/>
+          <a:chOff x="0" y="0"/>
+          <a:chExt cx="0" cy="0"/>
+        </a:xfrm>
+      </p:grpSpPr>
+      <p:sp>
+        <p:nvSpPr>
+          <p:cNvPr id="881" name="Google Shape;881;gcc7554a049_0_438:notes">
+            <a:extLst>
+              <a:ext uri="{FF2B5EF4-FFF2-40B4-BE49-F238E27FC236}">
+                <a16:creationId xmlns:a16="http://schemas.microsoft.com/office/drawing/2014/main" id="{74DE5232-FB03-F569-BA0A-AA74EE765400}"/>
+              </a:ext>
+            </a:extLst>
+          </p:cNvPr>
+          <p:cNvSpPr>
+            <a:spLocks noGrp="1" noRot="1" noChangeAspect="1"/>
+          </p:cNvSpPr>
+          <p:nvPr>
+            <p:ph type="sldImg" idx="2"/>
+          </p:nvPr>
+        </p:nvSpPr>
+        <p:spPr>
+          <a:xfrm>
+            <a:off x="381000" y="685800"/>
+            <a:ext cx="6096000" cy="3429000"/>
+          </a:xfrm>
+          <a:custGeom>
+            <a:avLst/>
+            <a:gdLst/>
+            <a:ahLst/>
+            <a:cxnLst/>
+            <a:rect l="l" t="t" r="r" b="b"/>
+            <a:pathLst>
+              <a:path w="120000" h="120000" extrusionOk="0">
+                <a:moveTo>
+                  <a:pt x="0" y="0"/>
+                </a:moveTo>
+                <a:lnTo>
+                  <a:pt x="120000" y="0"/>
+                </a:lnTo>
+                <a:lnTo>
+                  <a:pt x="120000" y="120000"/>
+                </a:lnTo>
+                <a:lnTo>
+                  <a:pt x="0" y="120000"/>
+                </a:lnTo>
+                <a:close/>
+              </a:path>
+            </a:pathLst>
+          </a:custGeom>
+        </p:spPr>
+      </p:sp>
+      <p:sp>
+        <p:nvSpPr>
+          <p:cNvPr id="882" name="Google Shape;882;gcc7554a049_0_438:notes">
+            <a:extLst>
+              <a:ext uri="{FF2B5EF4-FFF2-40B4-BE49-F238E27FC236}">
+                <a16:creationId xmlns:a16="http://schemas.microsoft.com/office/drawing/2014/main" id="{365D5E4F-4F49-B026-7C0F-8A328679822C}"/>
+              </a:ext>
+            </a:extLst>
+          </p:cNvPr>
+          <p:cNvSpPr txBox="1">
+            <a:spLocks noGrp="1"/>
+          </p:cNvSpPr>
+          <p:nvPr>
+            <p:ph type="body" idx="1"/>
+          </p:nvPr>
+        </p:nvSpPr>
+        <p:spPr>
+          <a:xfrm>
+            <a:off x="685800" y="4343400"/>
+            <a:ext cx="5486400" cy="4114800"/>
+          </a:xfrm>
+          <a:prstGeom prst="rect">
+            <a:avLst/>
+          </a:prstGeom>
+        </p:spPr>
+        <p:txBody>
+          <a:bodyPr spcFirstLastPara="1" wrap="square" lIns="91425" tIns="91425" rIns="91425" bIns="91425" anchor="t" anchorCtr="0">
+            <a:noAutofit/>
+          </a:bodyPr>
+          <a:lstStyle/>
+          <a:p>
+            <a:pPr marL="0" lvl="0" indent="0" algn="l" rtl="0">
+              <a:spcBef>
+                <a:spcPts val="0"/>
+              </a:spcBef>
+              <a:spcAft>
+                <a:spcPts val="0"/>
+              </a:spcAft>
+              <a:buNone/>
+            </a:pPr>
+            <a:endParaRPr/>
+          </a:p>
+        </p:txBody>
+      </p:sp>
+    </p:spTree>
+    <p:extLst>
+      <p:ext uri="{BB962C8B-B14F-4D97-AF65-F5344CB8AC3E}">
+        <p14:creationId xmlns:p14="http://schemas.microsoft.com/office/powerpoint/2010/main" val="905523195"/>
       </p:ext>
     </p:extLst>
   </p:cSld>
@@ -7805,10 +7942,9 @@
           </a:bodyPr>
           <a:lstStyle/>
           <a:p>
-            <a:pPr lvl="0"/>
             <a:r>
-              <a:rPr lang="en" sz="4000" dirty="0"/>
-              <a:t>Разработка e2e пайплайна прогнозирования спроса в ритейле</a:t>
+              <a:rPr lang="en-US" sz="4000" dirty="0"/>
+              <a:t>Development of an end-to-end demand forecasting pipeline for retail</a:t>
             </a:r>
             <a:endParaRPr sz="4000" dirty="0"/>
           </a:p>
@@ -8122,16 +8258,8 @@
           <a:p>
             <a:pPr lvl="0"/>
             <a:r>
-              <a:rPr lang="en" dirty="0"/>
-              <a:t>Данные на </a:t>
-            </a:r>
-            <a:r>
-              <a:rPr lang="ru-RU" dirty="0"/>
-              <a:t>выходе</a:t>
-            </a:r>
-            <a:r>
-              <a:rPr lang="en" dirty="0"/>
-              <a:t> шага</a:t>
+              <a:rPr lang="en-US" dirty="0"/>
+              <a:t>Output data for the step</a:t>
             </a:r>
             <a:endParaRPr dirty="0"/>
           </a:p>
@@ -8220,1148 +8348,100 @@
               <a:buChar char="•"/>
             </a:pPr>
             <a:r>
-              <a:rPr lang="en-US" altLang="en-US" sz="900" b="1" dirty="0">
-                <a:solidFill>
-                  <a:schemeClr val="tx1"/>
-                </a:solidFill>
-                <a:latin typeface="Arial" panose="020B0604020202020204" pitchFamily="34" charset="0"/>
-              </a:rPr>
-              <a:t>PRODUCT_ID</a:t>
+              <a:rPr lang="en-US" sz="900" b="1" dirty="0"/>
+              <a:t>PRODUCT_ID </a:t>
             </a:r>
             <a:r>
-              <a:rPr lang="en-US" altLang="en-US" sz="900" dirty="0">
-                <a:solidFill>
-                  <a:schemeClr val="tx1"/>
-                </a:solidFill>
-                <a:latin typeface="Arial" panose="020B0604020202020204" pitchFamily="34" charset="0"/>
-              </a:rPr>
-              <a:t> – </a:t>
+              <a:rPr lang="en-US" sz="900" dirty="0"/>
+              <a:t>– product identifier for which the forecast is calculated</a:t>
+            </a:r>
+            <a:br>
+              <a:rPr lang="en-US" sz="900" dirty="0"/>
+            </a:br>
+            <a:r>
+              <a:rPr lang="en-US" sz="900" b="1" dirty="0"/>
+              <a:t>LOCATION_ID </a:t>
             </a:r>
             <a:r>
-              <a:rPr lang="en-US" altLang="en-US" sz="900" dirty="0" err="1">
-                <a:solidFill>
-                  <a:schemeClr val="tx1"/>
-                </a:solidFill>
-                <a:latin typeface="Arial" panose="020B0604020202020204" pitchFamily="34" charset="0"/>
-              </a:rPr>
-              <a:t>идентификатор</a:t>
+              <a:rPr lang="en-US" sz="900" dirty="0"/>
+              <a:t>– location identifier (store / warehouse)</a:t>
+            </a:r>
+            <a:br>
+              <a:rPr lang="en-US" sz="900" dirty="0"/>
+            </a:br>
+            <a:r>
+              <a:rPr lang="en-US" sz="900" b="1" dirty="0"/>
+              <a:t>CUSTOMER_ID </a:t>
             </a:r>
             <a:r>
-              <a:rPr lang="en-US" altLang="en-US" sz="900" dirty="0">
-                <a:solidFill>
-                  <a:schemeClr val="tx1"/>
-                </a:solidFill>
-                <a:latin typeface="Arial" panose="020B0604020202020204" pitchFamily="34" charset="0"/>
-              </a:rPr>
-              <a:t> </a:t>
+              <a:rPr lang="en-US" sz="900" dirty="0"/>
+              <a:t>– customer identifier (if used in the mart)</a:t>
+            </a:r>
+            <a:br>
+              <a:rPr lang="en-US" sz="900" dirty="0"/>
+            </a:br>
+            <a:r>
+              <a:rPr lang="en-US" sz="900" b="1" dirty="0"/>
+              <a:t>DISTR_CHANNEL_ID </a:t>
             </a:r>
             <a:r>
-              <a:rPr lang="en-US" altLang="en-US" sz="900" dirty="0" err="1">
-                <a:solidFill>
-                  <a:schemeClr val="tx1"/>
-                </a:solidFill>
-                <a:latin typeface="Arial" panose="020B0604020202020204" pitchFamily="34" charset="0"/>
-              </a:rPr>
-              <a:t>продукта</a:t>
+              <a:rPr lang="en-US" sz="900" dirty="0"/>
+              <a:t>– distribution channel identifier</a:t>
+            </a:r>
+            <a:br>
+              <a:rPr lang="en-US" sz="900" dirty="0"/>
+            </a:br>
+            <a:r>
+              <a:rPr lang="en-US" sz="900" b="1" dirty="0"/>
+              <a:t>PERIOD_DT </a:t>
             </a:r>
             <a:r>
-              <a:rPr lang="en-US" altLang="en-US" sz="900" dirty="0">
-                <a:solidFill>
-                  <a:schemeClr val="tx1"/>
-                </a:solidFill>
-                <a:latin typeface="Arial" panose="020B0604020202020204" pitchFamily="34" charset="0"/>
-              </a:rPr>
-              <a:t>, </a:t>
+              <a:rPr lang="en-US" sz="900" dirty="0"/>
+              <a:t>– start of the interval in the target time granularity (DAY / WEEK.2)</a:t>
+            </a:r>
+            <a:br>
+              <a:rPr lang="en-US" sz="900" dirty="0"/>
+            </a:br>
+            <a:r>
+              <a:rPr lang="en-US" sz="900" b="1" dirty="0"/>
+              <a:t>PERIOD_END_DT </a:t>
             </a:r>
             <a:r>
-              <a:rPr lang="en-US" altLang="en-US" sz="900" dirty="0" err="1">
-                <a:solidFill>
-                  <a:schemeClr val="tx1"/>
-                </a:solidFill>
-                <a:latin typeface="Arial" panose="020B0604020202020204" pitchFamily="34" charset="0"/>
-              </a:rPr>
-              <a:t>для</a:t>
+              <a:rPr lang="en-US" sz="900" dirty="0"/>
+              <a:t>– end of the interval (for DAY it matches PERIOD_DT; for WEEK.2 it is the week end)</a:t>
+            </a:r>
+            <a:br>
+              <a:rPr lang="en-US" sz="900" dirty="0"/>
+            </a:br>
+            <a:r>
+              <a:rPr lang="en-US" sz="900" b="1" dirty="0"/>
+              <a:t>VF_FORECAST_VALUE </a:t>
             </a:r>
             <a:r>
-              <a:rPr lang="en-US" altLang="en-US" sz="900" dirty="0">
-                <a:solidFill>
-                  <a:schemeClr val="tx1"/>
-                </a:solidFill>
-                <a:latin typeface="Arial" panose="020B0604020202020204" pitchFamily="34" charset="0"/>
-              </a:rPr>
-              <a:t> </a:t>
+              <a:rPr lang="en-US" sz="900" dirty="0"/>
+              <a:t>– disaggregated VF forecast volume for this interval</a:t>
+            </a:r>
+            <a:br>
+              <a:rPr lang="en-US" sz="900" dirty="0"/>
+            </a:br>
+            <a:r>
+              <a:rPr lang="en-US" sz="900" b="1" dirty="0"/>
+              <a:t>ML_FORECAST_VALUE </a:t>
             </a:r>
             <a:r>
-              <a:rPr lang="en-US" altLang="en-US" sz="900" dirty="0" err="1">
-                <a:solidFill>
-                  <a:schemeClr val="tx1"/>
-                </a:solidFill>
-                <a:latin typeface="Arial" panose="020B0604020202020204" pitchFamily="34" charset="0"/>
-              </a:rPr>
-              <a:t>которого</a:t>
+              <a:rPr lang="en-US" sz="900" dirty="0"/>
+              <a:t>– disaggregated ML forecast volume for this interval</a:t>
+            </a:r>
+            <a:br>
+              <a:rPr lang="en-US" sz="900" dirty="0"/>
+            </a:br>
+            <a:r>
+              <a:rPr lang="en-US" sz="900" b="1" dirty="0"/>
+              <a:t>HYBRID_FORECAST_VALUE </a:t>
             </a:r>
             <a:r>
-              <a:rPr lang="en-US" altLang="en-US" sz="900" dirty="0">
-                <a:solidFill>
-                  <a:schemeClr val="tx1"/>
-                </a:solidFill>
-                <a:latin typeface="Arial" panose="020B0604020202020204" pitchFamily="34" charset="0"/>
-              </a:rPr>
-              <a:t> </a:t>
-            </a:r>
-            <a:r>
-              <a:rPr lang="en-US" altLang="en-US" sz="900" dirty="0" err="1">
-                <a:solidFill>
-                  <a:schemeClr val="tx1"/>
-                </a:solidFill>
-                <a:latin typeface="Arial" panose="020B0604020202020204" pitchFamily="34" charset="0"/>
-              </a:rPr>
-              <a:t>посчитан</a:t>
-            </a:r>
-            <a:r>
-              <a:rPr lang="en-US" altLang="en-US" sz="900" dirty="0">
-                <a:solidFill>
-                  <a:schemeClr val="tx1"/>
-                </a:solidFill>
-                <a:latin typeface="Arial" panose="020B0604020202020204" pitchFamily="34" charset="0"/>
-              </a:rPr>
-              <a:t> </a:t>
-            </a:r>
-            <a:r>
-              <a:rPr lang="en-US" altLang="en-US" sz="900" dirty="0" err="1">
-                <a:solidFill>
-                  <a:schemeClr val="tx1"/>
-                </a:solidFill>
-                <a:latin typeface="Arial" panose="020B0604020202020204" pitchFamily="34" charset="0"/>
-              </a:rPr>
-              <a:t>прогноз</a:t>
-            </a:r>
-            <a:endParaRPr lang="en-US" altLang="en-US" sz="900" dirty="0">
-              <a:solidFill>
-                <a:schemeClr val="tx1"/>
-              </a:solidFill>
-              <a:latin typeface="Arial" panose="020B0604020202020204" pitchFamily="34" charset="0"/>
-            </a:endParaRPr>
-          </a:p>
-          <a:p>
-            <a:pPr marL="0" lvl="0" indent="0" algn="l" eaLnBrk="0" fontAlgn="base" hangingPunct="0">
-              <a:spcBef>
-                <a:spcPct val="0"/>
-              </a:spcBef>
-              <a:spcAft>
-                <a:spcPct val="0"/>
-              </a:spcAft>
-              <a:buClrTx/>
-              <a:buSzTx/>
-              <a:buFontTx/>
-              <a:buChar char="•"/>
-            </a:pPr>
-            <a:r>
-              <a:rPr lang="en-US" altLang="en-US" sz="900" b="1" dirty="0">
-                <a:solidFill>
-                  <a:schemeClr val="tx1"/>
-                </a:solidFill>
-                <a:latin typeface="Arial" panose="020B0604020202020204" pitchFamily="34" charset="0"/>
-              </a:rPr>
-              <a:t>LOCATION_ID</a:t>
-            </a:r>
-            <a:r>
-              <a:rPr lang="en-US" altLang="en-US" sz="900" dirty="0">
-                <a:solidFill>
-                  <a:schemeClr val="tx1"/>
-                </a:solidFill>
-                <a:latin typeface="Arial" panose="020B0604020202020204" pitchFamily="34" charset="0"/>
-              </a:rPr>
-              <a:t> – </a:t>
-            </a:r>
-            <a:r>
-              <a:rPr lang="en-US" altLang="en-US" sz="900" dirty="0" err="1">
-                <a:solidFill>
-                  <a:schemeClr val="tx1"/>
-                </a:solidFill>
-                <a:latin typeface="Arial" panose="020B0604020202020204" pitchFamily="34" charset="0"/>
-              </a:rPr>
-              <a:t>идентификатор</a:t>
-            </a:r>
-            <a:r>
-              <a:rPr lang="en-US" altLang="en-US" sz="900" dirty="0">
-                <a:solidFill>
-                  <a:schemeClr val="tx1"/>
-                </a:solidFill>
-                <a:latin typeface="Arial" panose="020B0604020202020204" pitchFamily="34" charset="0"/>
-              </a:rPr>
-              <a:t> </a:t>
-            </a:r>
-            <a:r>
-              <a:rPr lang="en-US" altLang="en-US" sz="900" dirty="0" err="1">
-                <a:solidFill>
-                  <a:schemeClr val="tx1"/>
-                </a:solidFill>
-                <a:latin typeface="Arial" panose="020B0604020202020204" pitchFamily="34" charset="0"/>
-              </a:rPr>
-              <a:t>локации</a:t>
-            </a:r>
-            <a:r>
-              <a:rPr lang="en-US" altLang="en-US" sz="900" dirty="0">
-                <a:solidFill>
-                  <a:schemeClr val="tx1"/>
-                </a:solidFill>
-                <a:latin typeface="Arial" panose="020B0604020202020204" pitchFamily="34" charset="0"/>
-              </a:rPr>
-              <a:t> (</a:t>
-            </a:r>
-            <a:r>
-              <a:rPr lang="en-US" altLang="en-US" sz="900" dirty="0" err="1">
-                <a:solidFill>
-                  <a:schemeClr val="tx1"/>
-                </a:solidFill>
-                <a:latin typeface="Arial" panose="020B0604020202020204" pitchFamily="34" charset="0"/>
-              </a:rPr>
-              <a:t>магазин</a:t>
-            </a:r>
-            <a:r>
-              <a:rPr lang="en-US" altLang="en-US" sz="900" dirty="0">
-                <a:solidFill>
-                  <a:schemeClr val="tx1"/>
-                </a:solidFill>
-                <a:latin typeface="Arial" panose="020B0604020202020204" pitchFamily="34" charset="0"/>
-              </a:rPr>
-              <a:t> / </a:t>
-            </a:r>
-            <a:r>
-              <a:rPr lang="en-US" altLang="en-US" sz="900" dirty="0" err="1">
-                <a:solidFill>
-                  <a:schemeClr val="tx1"/>
-                </a:solidFill>
-                <a:latin typeface="Arial" panose="020B0604020202020204" pitchFamily="34" charset="0"/>
-              </a:rPr>
-              <a:t>склад</a:t>
-            </a:r>
-            <a:r>
-              <a:rPr lang="en-US" altLang="en-US" sz="900" dirty="0">
-                <a:solidFill>
-                  <a:schemeClr val="tx1"/>
-                </a:solidFill>
-                <a:latin typeface="Arial" panose="020B0604020202020204" pitchFamily="34" charset="0"/>
-              </a:rPr>
-              <a:t>)</a:t>
-            </a:r>
-          </a:p>
-          <a:p>
-            <a:pPr marL="0" lvl="0" indent="0" algn="l" eaLnBrk="0" fontAlgn="base" hangingPunct="0">
-              <a:spcBef>
-                <a:spcPct val="0"/>
-              </a:spcBef>
-              <a:spcAft>
-                <a:spcPct val="0"/>
-              </a:spcAft>
-              <a:buClrTx/>
-              <a:buSzTx/>
-              <a:buFontTx/>
-              <a:buChar char="•"/>
-            </a:pPr>
-            <a:r>
-              <a:rPr lang="en-US" altLang="en-US" sz="900" b="1" dirty="0">
-                <a:solidFill>
-                  <a:schemeClr val="tx1"/>
-                </a:solidFill>
-                <a:latin typeface="Arial" panose="020B0604020202020204" pitchFamily="34" charset="0"/>
-              </a:rPr>
-              <a:t>CUSTOMER_ID</a:t>
-            </a:r>
-            <a:r>
-              <a:rPr lang="en-US" altLang="en-US" sz="900" dirty="0">
-                <a:solidFill>
-                  <a:schemeClr val="tx1"/>
-                </a:solidFill>
-                <a:latin typeface="Arial" panose="020B0604020202020204" pitchFamily="34" charset="0"/>
-              </a:rPr>
-              <a:t> – </a:t>
-            </a:r>
-            <a:r>
-              <a:rPr lang="en-US" altLang="en-US" sz="900" dirty="0" err="1">
-                <a:solidFill>
-                  <a:schemeClr val="tx1"/>
-                </a:solidFill>
-                <a:latin typeface="Arial" panose="020B0604020202020204" pitchFamily="34" charset="0"/>
-              </a:rPr>
-              <a:t>идентификатор</a:t>
-            </a:r>
-            <a:r>
-              <a:rPr lang="en-US" altLang="en-US" sz="900" dirty="0">
-                <a:solidFill>
-                  <a:schemeClr val="tx1"/>
-                </a:solidFill>
-                <a:latin typeface="Arial" panose="020B0604020202020204" pitchFamily="34" charset="0"/>
-              </a:rPr>
-              <a:t> </a:t>
-            </a:r>
-            <a:r>
-              <a:rPr lang="en-US" altLang="en-US" sz="900" dirty="0" err="1">
-                <a:solidFill>
-                  <a:schemeClr val="tx1"/>
-                </a:solidFill>
-                <a:latin typeface="Arial" panose="020B0604020202020204" pitchFamily="34" charset="0"/>
-              </a:rPr>
-              <a:t>клиента</a:t>
-            </a:r>
-            <a:r>
-              <a:rPr lang="en-US" altLang="en-US" sz="900" dirty="0">
-                <a:solidFill>
-                  <a:schemeClr val="tx1"/>
-                </a:solidFill>
-                <a:latin typeface="Arial" panose="020B0604020202020204" pitchFamily="34" charset="0"/>
-              </a:rPr>
-              <a:t> (</a:t>
-            </a:r>
-            <a:r>
-              <a:rPr lang="en-US" altLang="en-US" sz="900" dirty="0" err="1">
-                <a:solidFill>
-                  <a:schemeClr val="tx1"/>
-                </a:solidFill>
-                <a:latin typeface="Arial" panose="020B0604020202020204" pitchFamily="34" charset="0"/>
-              </a:rPr>
-              <a:t>если</a:t>
-            </a:r>
-            <a:r>
-              <a:rPr lang="en-US" altLang="en-US" sz="900" dirty="0">
-                <a:solidFill>
-                  <a:schemeClr val="tx1"/>
-                </a:solidFill>
-                <a:latin typeface="Arial" panose="020B0604020202020204" pitchFamily="34" charset="0"/>
-              </a:rPr>
-              <a:t> </a:t>
-            </a:r>
-            <a:r>
-              <a:rPr lang="en-US" altLang="en-US" sz="900" dirty="0" err="1">
-                <a:solidFill>
-                  <a:schemeClr val="tx1"/>
-                </a:solidFill>
-                <a:latin typeface="Arial" panose="020B0604020202020204" pitchFamily="34" charset="0"/>
-              </a:rPr>
-              <a:t>используется</a:t>
-            </a:r>
-            <a:r>
-              <a:rPr lang="en-US" altLang="en-US" sz="900" dirty="0">
-                <a:solidFill>
-                  <a:schemeClr val="tx1"/>
-                </a:solidFill>
-                <a:latin typeface="Arial" panose="020B0604020202020204" pitchFamily="34" charset="0"/>
-              </a:rPr>
-              <a:t> в </a:t>
-            </a:r>
-            <a:r>
-              <a:rPr lang="en-US" altLang="en-US" sz="900" dirty="0" err="1">
-                <a:solidFill>
-                  <a:schemeClr val="tx1"/>
-                </a:solidFill>
-                <a:latin typeface="Arial" panose="020B0604020202020204" pitchFamily="34" charset="0"/>
-              </a:rPr>
-              <a:t>витрине</a:t>
-            </a:r>
-            <a:r>
-              <a:rPr lang="en-US" altLang="en-US" sz="900" dirty="0">
-                <a:solidFill>
-                  <a:schemeClr val="tx1"/>
-                </a:solidFill>
-                <a:latin typeface="Arial" panose="020B0604020202020204" pitchFamily="34" charset="0"/>
-              </a:rPr>
-              <a:t>)</a:t>
-            </a:r>
-          </a:p>
-          <a:p>
-            <a:pPr marL="0" lvl="0" indent="0" algn="l" eaLnBrk="0" fontAlgn="base" hangingPunct="0">
-              <a:spcBef>
-                <a:spcPct val="0"/>
-              </a:spcBef>
-              <a:spcAft>
-                <a:spcPct val="0"/>
-              </a:spcAft>
-              <a:buClrTx/>
-              <a:buSzTx/>
-              <a:buFontTx/>
-              <a:buChar char="•"/>
-            </a:pPr>
-            <a:r>
-              <a:rPr lang="en-US" altLang="en-US" sz="900" b="1" dirty="0">
-                <a:solidFill>
-                  <a:schemeClr val="tx1"/>
-                </a:solidFill>
-                <a:latin typeface="Arial" panose="020B0604020202020204" pitchFamily="34" charset="0"/>
-              </a:rPr>
-              <a:t>DISTR_CHANNEL_ID</a:t>
-            </a:r>
-            <a:r>
-              <a:rPr lang="en-US" altLang="en-US" sz="900" dirty="0">
-                <a:solidFill>
-                  <a:schemeClr val="tx1"/>
-                </a:solidFill>
-                <a:latin typeface="Arial" panose="020B0604020202020204" pitchFamily="34" charset="0"/>
-              </a:rPr>
-              <a:t> – </a:t>
-            </a:r>
-            <a:r>
-              <a:rPr lang="en-US" altLang="en-US" sz="900" dirty="0" err="1">
-                <a:solidFill>
-                  <a:schemeClr val="tx1"/>
-                </a:solidFill>
-                <a:latin typeface="Arial" panose="020B0604020202020204" pitchFamily="34" charset="0"/>
-              </a:rPr>
-              <a:t>идентификатор</a:t>
-            </a:r>
-            <a:r>
-              <a:rPr lang="en-US" altLang="en-US" sz="900" dirty="0">
-                <a:solidFill>
-                  <a:schemeClr val="tx1"/>
-                </a:solidFill>
-                <a:latin typeface="Arial" panose="020B0604020202020204" pitchFamily="34" charset="0"/>
-              </a:rPr>
-              <a:t> </a:t>
-            </a:r>
-            <a:r>
-              <a:rPr lang="en-US" altLang="en-US" sz="900" dirty="0" err="1">
-                <a:solidFill>
-                  <a:schemeClr val="tx1"/>
-                </a:solidFill>
-                <a:latin typeface="Arial" panose="020B0604020202020204" pitchFamily="34" charset="0"/>
-              </a:rPr>
-              <a:t>канала</a:t>
-            </a:r>
-            <a:r>
-              <a:rPr lang="en-US" altLang="en-US" sz="900" dirty="0">
-                <a:solidFill>
-                  <a:schemeClr val="tx1"/>
-                </a:solidFill>
-                <a:latin typeface="Arial" panose="020B0604020202020204" pitchFamily="34" charset="0"/>
-              </a:rPr>
-              <a:t> </a:t>
-            </a:r>
-            <a:r>
-              <a:rPr lang="en-US" altLang="en-US" sz="900" dirty="0" err="1">
-                <a:solidFill>
-                  <a:schemeClr val="tx1"/>
-                </a:solidFill>
-                <a:latin typeface="Arial" panose="020B0604020202020204" pitchFamily="34" charset="0"/>
-              </a:rPr>
-              <a:t>дистрибуции</a:t>
-            </a:r>
-            <a:endParaRPr lang="en-US" altLang="en-US" sz="900" dirty="0">
-              <a:solidFill>
-                <a:schemeClr val="tx1"/>
-              </a:solidFill>
-              <a:latin typeface="Arial" panose="020B0604020202020204" pitchFamily="34" charset="0"/>
-            </a:endParaRPr>
-          </a:p>
-          <a:p>
-            <a:pPr marL="0" lvl="0" indent="0" algn="l" eaLnBrk="0" fontAlgn="base" hangingPunct="0">
-              <a:spcBef>
-                <a:spcPct val="0"/>
-              </a:spcBef>
-              <a:spcAft>
-                <a:spcPct val="0"/>
-              </a:spcAft>
-              <a:buClrTx/>
-              <a:buSzTx/>
-              <a:buFontTx/>
-              <a:buChar char="•"/>
-            </a:pPr>
-            <a:r>
-              <a:rPr lang="en-US" altLang="en-US" sz="900" b="1" dirty="0">
-                <a:solidFill>
-                  <a:schemeClr val="tx1"/>
-                </a:solidFill>
-                <a:latin typeface="Arial" panose="020B0604020202020204" pitchFamily="34" charset="0"/>
-              </a:rPr>
-              <a:t>PERIOD_DT</a:t>
-            </a:r>
-            <a:r>
-              <a:rPr lang="en-US" altLang="en-US" sz="900" dirty="0">
-                <a:solidFill>
-                  <a:schemeClr val="tx1"/>
-                </a:solidFill>
-                <a:latin typeface="Arial" panose="020B0604020202020204" pitchFamily="34" charset="0"/>
-              </a:rPr>
-              <a:t> – </a:t>
-            </a:r>
-            <a:r>
-              <a:rPr lang="en-US" altLang="en-US" sz="900" dirty="0" err="1">
-                <a:solidFill>
-                  <a:schemeClr val="tx1"/>
-                </a:solidFill>
-                <a:latin typeface="Arial" panose="020B0604020202020204" pitchFamily="34" charset="0"/>
-              </a:rPr>
-              <a:t>начало</a:t>
-            </a:r>
-            <a:r>
-              <a:rPr lang="en-US" altLang="en-US" sz="900" dirty="0">
-                <a:solidFill>
-                  <a:schemeClr val="tx1"/>
-                </a:solidFill>
-                <a:latin typeface="Arial" panose="020B0604020202020204" pitchFamily="34" charset="0"/>
-              </a:rPr>
-              <a:t> </a:t>
-            </a:r>
-            <a:r>
-              <a:rPr lang="en-US" altLang="en-US" sz="900" dirty="0" err="1">
-                <a:solidFill>
-                  <a:schemeClr val="tx1"/>
-                </a:solidFill>
-                <a:latin typeface="Arial" panose="020B0604020202020204" pitchFamily="34" charset="0"/>
-              </a:rPr>
-              <a:t>интервала</a:t>
-            </a:r>
-            <a:r>
-              <a:rPr lang="en-US" altLang="en-US" sz="900" dirty="0">
-                <a:solidFill>
-                  <a:schemeClr val="tx1"/>
-                </a:solidFill>
-                <a:latin typeface="Arial" panose="020B0604020202020204" pitchFamily="34" charset="0"/>
-              </a:rPr>
-              <a:t> в </a:t>
-            </a:r>
-            <a:r>
-              <a:rPr lang="en-US" altLang="en-US" sz="900" dirty="0" err="1">
-                <a:solidFill>
-                  <a:schemeClr val="tx1"/>
-                </a:solidFill>
-                <a:latin typeface="Arial" panose="020B0604020202020204" pitchFamily="34" charset="0"/>
-              </a:rPr>
-              <a:t>целевой</a:t>
-            </a:r>
-            <a:r>
-              <a:rPr lang="en-US" altLang="en-US" sz="900" dirty="0">
-                <a:solidFill>
-                  <a:schemeClr val="tx1"/>
-                </a:solidFill>
-                <a:latin typeface="Arial" panose="020B0604020202020204" pitchFamily="34" charset="0"/>
-              </a:rPr>
-              <a:t> </a:t>
-            </a:r>
-            <a:r>
-              <a:rPr lang="en-US" altLang="en-US" sz="900" dirty="0" err="1">
-                <a:solidFill>
-                  <a:schemeClr val="tx1"/>
-                </a:solidFill>
-                <a:latin typeface="Arial" panose="020B0604020202020204" pitchFamily="34" charset="0"/>
-              </a:rPr>
-              <a:t>временной</a:t>
-            </a:r>
-            <a:r>
-              <a:rPr lang="en-US" altLang="en-US" sz="900" dirty="0">
-                <a:solidFill>
-                  <a:schemeClr val="tx1"/>
-                </a:solidFill>
-                <a:latin typeface="Arial" panose="020B0604020202020204" pitchFamily="34" charset="0"/>
-              </a:rPr>
-              <a:t> </a:t>
-            </a:r>
-            <a:r>
-              <a:rPr lang="en-US" altLang="en-US" sz="900" dirty="0" err="1">
-                <a:solidFill>
-                  <a:schemeClr val="tx1"/>
-                </a:solidFill>
-                <a:latin typeface="Arial" panose="020B0604020202020204" pitchFamily="34" charset="0"/>
-              </a:rPr>
-              <a:t>гранулярности</a:t>
-            </a:r>
-            <a:r>
-              <a:rPr lang="en-US" altLang="en-US" sz="900" dirty="0">
-                <a:solidFill>
-                  <a:schemeClr val="tx1"/>
-                </a:solidFill>
-                <a:latin typeface="Arial" panose="020B0604020202020204" pitchFamily="34" charset="0"/>
-              </a:rPr>
-              <a:t> (DAY / WEEK.2)</a:t>
-            </a:r>
-          </a:p>
-          <a:p>
-            <a:pPr marL="0" lvl="0" indent="0" algn="l" eaLnBrk="0" fontAlgn="base" hangingPunct="0">
-              <a:spcBef>
-                <a:spcPct val="0"/>
-              </a:spcBef>
-              <a:spcAft>
-                <a:spcPct val="0"/>
-              </a:spcAft>
-              <a:buClrTx/>
-              <a:buSzTx/>
-              <a:buFontTx/>
-              <a:buChar char="•"/>
-            </a:pPr>
-            <a:r>
-              <a:rPr lang="en-US" altLang="en-US" sz="900" b="1" dirty="0">
-                <a:solidFill>
-                  <a:schemeClr val="tx1"/>
-                </a:solidFill>
-                <a:latin typeface="Arial" panose="020B0604020202020204" pitchFamily="34" charset="0"/>
-              </a:rPr>
-              <a:t>PERIOD_END_DT</a:t>
-            </a:r>
-            <a:r>
-              <a:rPr lang="en-US" altLang="en-US" sz="900" dirty="0">
-                <a:solidFill>
-                  <a:schemeClr val="tx1"/>
-                </a:solidFill>
-                <a:latin typeface="Arial" panose="020B0604020202020204" pitchFamily="34" charset="0"/>
-              </a:rPr>
-              <a:t> – </a:t>
-            </a:r>
-            <a:r>
-              <a:rPr lang="en-US" altLang="en-US" sz="900" dirty="0" err="1">
-                <a:solidFill>
-                  <a:schemeClr val="tx1"/>
-                </a:solidFill>
-                <a:latin typeface="Arial" panose="020B0604020202020204" pitchFamily="34" charset="0"/>
-              </a:rPr>
-              <a:t>конец</a:t>
-            </a:r>
-            <a:r>
-              <a:rPr lang="en-US" altLang="en-US" sz="900" dirty="0">
-                <a:solidFill>
-                  <a:schemeClr val="tx1"/>
-                </a:solidFill>
-                <a:latin typeface="Arial" panose="020B0604020202020204" pitchFamily="34" charset="0"/>
-              </a:rPr>
-              <a:t> </a:t>
-            </a:r>
-            <a:r>
-              <a:rPr lang="en-US" altLang="en-US" sz="900" dirty="0" err="1">
-                <a:solidFill>
-                  <a:schemeClr val="tx1"/>
-                </a:solidFill>
-                <a:latin typeface="Arial" panose="020B0604020202020204" pitchFamily="34" charset="0"/>
-              </a:rPr>
-              <a:t>интервала</a:t>
-            </a:r>
-            <a:r>
-              <a:rPr lang="en-US" altLang="en-US" sz="900" dirty="0">
-                <a:solidFill>
-                  <a:schemeClr val="tx1"/>
-                </a:solidFill>
-                <a:latin typeface="Arial" panose="020B0604020202020204" pitchFamily="34" charset="0"/>
-              </a:rPr>
-              <a:t> (</a:t>
-            </a:r>
-            <a:r>
-              <a:rPr lang="en-US" altLang="en-US" sz="900" dirty="0" err="1">
-                <a:solidFill>
-                  <a:schemeClr val="tx1"/>
-                </a:solidFill>
-                <a:latin typeface="Arial" panose="020B0604020202020204" pitchFamily="34" charset="0"/>
-              </a:rPr>
-              <a:t>для</a:t>
-            </a:r>
-            <a:r>
-              <a:rPr lang="en-US" altLang="en-US" sz="900" dirty="0">
-                <a:solidFill>
-                  <a:schemeClr val="tx1"/>
-                </a:solidFill>
-                <a:latin typeface="Arial" panose="020B0604020202020204" pitchFamily="34" charset="0"/>
-              </a:rPr>
-              <a:t> DAY </a:t>
-            </a:r>
-            <a:r>
-              <a:rPr lang="en-US" altLang="en-US" sz="900" dirty="0" err="1">
-                <a:solidFill>
-                  <a:schemeClr val="tx1"/>
-                </a:solidFill>
-                <a:latin typeface="Arial" panose="020B0604020202020204" pitchFamily="34" charset="0"/>
-              </a:rPr>
-              <a:t>совпадает</a:t>
-            </a:r>
-            <a:r>
-              <a:rPr lang="en-US" altLang="en-US" sz="900" dirty="0">
-                <a:solidFill>
-                  <a:schemeClr val="tx1"/>
-                </a:solidFill>
-                <a:latin typeface="Arial" panose="020B0604020202020204" pitchFamily="34" charset="0"/>
-              </a:rPr>
-              <a:t> с PERIOD_DT, </a:t>
-            </a:r>
-            <a:r>
-              <a:rPr lang="en-US" altLang="en-US" sz="900" dirty="0" err="1">
-                <a:solidFill>
-                  <a:schemeClr val="tx1"/>
-                </a:solidFill>
-                <a:latin typeface="Arial" panose="020B0604020202020204" pitchFamily="34" charset="0"/>
-              </a:rPr>
-              <a:t>для</a:t>
-            </a:r>
-            <a:r>
-              <a:rPr lang="en-US" altLang="en-US" sz="900" dirty="0">
-                <a:solidFill>
-                  <a:schemeClr val="tx1"/>
-                </a:solidFill>
-                <a:latin typeface="Arial" panose="020B0604020202020204" pitchFamily="34" charset="0"/>
-              </a:rPr>
-              <a:t> WEEK.2 — </a:t>
-            </a:r>
-            <a:r>
-              <a:rPr lang="en-US" altLang="en-US" sz="900" dirty="0" err="1">
-                <a:solidFill>
-                  <a:schemeClr val="tx1"/>
-                </a:solidFill>
-                <a:latin typeface="Arial" panose="020B0604020202020204" pitchFamily="34" charset="0"/>
-              </a:rPr>
-              <a:t>конец</a:t>
-            </a:r>
-            <a:r>
-              <a:rPr lang="en-US" altLang="en-US" sz="900" dirty="0">
-                <a:solidFill>
-                  <a:schemeClr val="tx1"/>
-                </a:solidFill>
-                <a:latin typeface="Arial" panose="020B0604020202020204" pitchFamily="34" charset="0"/>
-              </a:rPr>
-              <a:t> </a:t>
-            </a:r>
-            <a:r>
-              <a:rPr lang="en-US" altLang="en-US" sz="900" dirty="0" err="1">
-                <a:solidFill>
-                  <a:schemeClr val="tx1"/>
-                </a:solidFill>
-                <a:latin typeface="Arial" panose="020B0604020202020204" pitchFamily="34" charset="0"/>
-              </a:rPr>
-              <a:t>недели</a:t>
-            </a:r>
-            <a:r>
-              <a:rPr lang="en-US" altLang="en-US" sz="900" dirty="0">
-                <a:solidFill>
-                  <a:schemeClr val="tx1"/>
-                </a:solidFill>
-                <a:latin typeface="Arial" panose="020B0604020202020204" pitchFamily="34" charset="0"/>
-              </a:rPr>
-              <a:t>)</a:t>
-            </a:r>
-          </a:p>
-          <a:p>
-            <a:pPr marL="0" lvl="0" indent="0" algn="l" eaLnBrk="0" fontAlgn="base" hangingPunct="0">
-              <a:spcBef>
-                <a:spcPct val="0"/>
-              </a:spcBef>
-              <a:spcAft>
-                <a:spcPct val="0"/>
-              </a:spcAft>
-              <a:buClrTx/>
-              <a:buSzTx/>
-              <a:buFontTx/>
-              <a:buChar char="•"/>
-            </a:pPr>
-            <a:r>
-              <a:rPr lang="en-US" altLang="en-US" sz="900" b="1" dirty="0">
-                <a:solidFill>
-                  <a:schemeClr val="tx1"/>
-                </a:solidFill>
-                <a:latin typeface="Arial" panose="020B0604020202020204" pitchFamily="34" charset="0"/>
-              </a:rPr>
-              <a:t>VF_FORECAST_VALUE</a:t>
-            </a:r>
-            <a:r>
-              <a:rPr lang="en-US" altLang="en-US" sz="900" dirty="0">
-                <a:solidFill>
-                  <a:schemeClr val="tx1"/>
-                </a:solidFill>
-                <a:latin typeface="Arial" panose="020B0604020202020204" pitchFamily="34" charset="0"/>
-              </a:rPr>
-              <a:t> – </a:t>
-            </a:r>
-            <a:r>
-              <a:rPr lang="en-US" altLang="en-US" sz="900" dirty="0" err="1">
-                <a:solidFill>
-                  <a:schemeClr val="tx1"/>
-                </a:solidFill>
-                <a:latin typeface="Arial" panose="020B0604020202020204" pitchFamily="34" charset="0"/>
-              </a:rPr>
-              <a:t>дизаккумулированный</a:t>
-            </a:r>
-            <a:r>
-              <a:rPr lang="en-US" altLang="en-US" sz="900" dirty="0">
-                <a:solidFill>
-                  <a:schemeClr val="tx1"/>
-                </a:solidFill>
-                <a:latin typeface="Arial" panose="020B0604020202020204" pitchFamily="34" charset="0"/>
-              </a:rPr>
-              <a:t> </a:t>
-            </a:r>
-            <a:r>
-              <a:rPr lang="en-US" altLang="en-US" sz="900" dirty="0" err="1">
-                <a:solidFill>
-                  <a:schemeClr val="tx1"/>
-                </a:solidFill>
-                <a:latin typeface="Arial" panose="020B0604020202020204" pitchFamily="34" charset="0"/>
-              </a:rPr>
-              <a:t>объём</a:t>
-            </a:r>
-            <a:r>
-              <a:rPr lang="en-US" altLang="en-US" sz="900" dirty="0">
-                <a:solidFill>
-                  <a:schemeClr val="tx1"/>
-                </a:solidFill>
-                <a:latin typeface="Arial" panose="020B0604020202020204" pitchFamily="34" charset="0"/>
-              </a:rPr>
-              <a:t> VF-</a:t>
-            </a:r>
-            <a:r>
-              <a:rPr lang="en-US" altLang="en-US" sz="900" dirty="0" err="1">
-                <a:solidFill>
-                  <a:schemeClr val="tx1"/>
-                </a:solidFill>
-                <a:latin typeface="Arial" panose="020B0604020202020204" pitchFamily="34" charset="0"/>
-              </a:rPr>
-              <a:t>прогноза</a:t>
-            </a:r>
-            <a:r>
-              <a:rPr lang="en-US" altLang="en-US" sz="900" dirty="0">
-                <a:solidFill>
-                  <a:schemeClr val="tx1"/>
-                </a:solidFill>
-                <a:latin typeface="Arial" panose="020B0604020202020204" pitchFamily="34" charset="0"/>
-              </a:rPr>
-              <a:t> </a:t>
-            </a:r>
-            <a:r>
-              <a:rPr lang="en-US" altLang="en-US" sz="900" dirty="0" err="1">
-                <a:solidFill>
-                  <a:schemeClr val="tx1"/>
-                </a:solidFill>
-                <a:latin typeface="Arial" panose="020B0604020202020204" pitchFamily="34" charset="0"/>
-              </a:rPr>
-              <a:t>на</a:t>
-            </a:r>
-            <a:r>
-              <a:rPr lang="en-US" altLang="en-US" sz="900" dirty="0">
-                <a:solidFill>
-                  <a:schemeClr val="tx1"/>
-                </a:solidFill>
-                <a:latin typeface="Arial" panose="020B0604020202020204" pitchFamily="34" charset="0"/>
-              </a:rPr>
-              <a:t> </a:t>
-            </a:r>
-            <a:r>
-              <a:rPr lang="en-US" altLang="en-US" sz="900" dirty="0" err="1">
-                <a:solidFill>
-                  <a:schemeClr val="tx1"/>
-                </a:solidFill>
-                <a:latin typeface="Arial" panose="020B0604020202020204" pitchFamily="34" charset="0"/>
-              </a:rPr>
-              <a:t>этот</a:t>
-            </a:r>
-            <a:r>
-              <a:rPr lang="en-US" altLang="en-US" sz="900" dirty="0">
-                <a:solidFill>
-                  <a:schemeClr val="tx1"/>
-                </a:solidFill>
-                <a:latin typeface="Arial" panose="020B0604020202020204" pitchFamily="34" charset="0"/>
-              </a:rPr>
-              <a:t> </a:t>
-            </a:r>
-            <a:r>
-              <a:rPr lang="en-US" altLang="en-US" sz="900" dirty="0" err="1">
-                <a:solidFill>
-                  <a:schemeClr val="tx1"/>
-                </a:solidFill>
-                <a:latin typeface="Arial" panose="020B0604020202020204" pitchFamily="34" charset="0"/>
-              </a:rPr>
-              <a:t>интервал</a:t>
-            </a:r>
-            <a:endParaRPr lang="en-US" altLang="en-US" sz="900" dirty="0">
-              <a:solidFill>
-                <a:schemeClr val="tx1"/>
-              </a:solidFill>
-              <a:latin typeface="Arial" panose="020B0604020202020204" pitchFamily="34" charset="0"/>
-            </a:endParaRPr>
-          </a:p>
-          <a:p>
-            <a:pPr marL="0" lvl="0" indent="0" algn="l" eaLnBrk="0" fontAlgn="base" hangingPunct="0">
-              <a:spcBef>
-                <a:spcPct val="0"/>
-              </a:spcBef>
-              <a:spcAft>
-                <a:spcPct val="0"/>
-              </a:spcAft>
-              <a:buClrTx/>
-              <a:buSzTx/>
-              <a:buFontTx/>
-              <a:buChar char="•"/>
-            </a:pPr>
-            <a:r>
-              <a:rPr lang="en-US" altLang="en-US" sz="900" b="1" dirty="0">
-                <a:solidFill>
-                  <a:schemeClr val="tx1"/>
-                </a:solidFill>
-                <a:latin typeface="Arial" panose="020B0604020202020204" pitchFamily="34" charset="0"/>
-              </a:rPr>
-              <a:t>ML_FORECAST_VALUE</a:t>
-            </a:r>
-            <a:r>
-              <a:rPr lang="en-US" altLang="en-US" sz="900" dirty="0">
-                <a:solidFill>
-                  <a:schemeClr val="tx1"/>
-                </a:solidFill>
-                <a:latin typeface="Arial" panose="020B0604020202020204" pitchFamily="34" charset="0"/>
-              </a:rPr>
-              <a:t> – </a:t>
-            </a:r>
-            <a:r>
-              <a:rPr lang="en-US" altLang="en-US" sz="900" dirty="0" err="1">
-                <a:solidFill>
-                  <a:schemeClr val="tx1"/>
-                </a:solidFill>
-                <a:latin typeface="Arial" panose="020B0604020202020204" pitchFamily="34" charset="0"/>
-              </a:rPr>
-              <a:t>дизаккумулированный</a:t>
-            </a:r>
-            <a:r>
-              <a:rPr lang="en-US" altLang="en-US" sz="900" dirty="0">
-                <a:solidFill>
-                  <a:schemeClr val="tx1"/>
-                </a:solidFill>
-                <a:latin typeface="Arial" panose="020B0604020202020204" pitchFamily="34" charset="0"/>
-              </a:rPr>
-              <a:t> </a:t>
-            </a:r>
-            <a:r>
-              <a:rPr lang="en-US" altLang="en-US" sz="900" dirty="0" err="1">
-                <a:solidFill>
-                  <a:schemeClr val="tx1"/>
-                </a:solidFill>
-                <a:latin typeface="Arial" panose="020B0604020202020204" pitchFamily="34" charset="0"/>
-              </a:rPr>
-              <a:t>объём</a:t>
-            </a:r>
-            <a:r>
-              <a:rPr lang="en-US" altLang="en-US" sz="900" dirty="0">
-                <a:solidFill>
-                  <a:schemeClr val="tx1"/>
-                </a:solidFill>
-                <a:latin typeface="Arial" panose="020B0604020202020204" pitchFamily="34" charset="0"/>
-              </a:rPr>
-              <a:t> ML-</a:t>
-            </a:r>
-            <a:r>
-              <a:rPr lang="en-US" altLang="en-US" sz="900" dirty="0" err="1">
-                <a:solidFill>
-                  <a:schemeClr val="tx1"/>
-                </a:solidFill>
-                <a:latin typeface="Arial" panose="020B0604020202020204" pitchFamily="34" charset="0"/>
-              </a:rPr>
-              <a:t>прогноза</a:t>
-            </a:r>
-            <a:r>
-              <a:rPr lang="en-US" altLang="en-US" sz="900" dirty="0">
-                <a:solidFill>
-                  <a:schemeClr val="tx1"/>
-                </a:solidFill>
-                <a:latin typeface="Arial" panose="020B0604020202020204" pitchFamily="34" charset="0"/>
-              </a:rPr>
-              <a:t> </a:t>
-            </a:r>
-            <a:r>
-              <a:rPr lang="en-US" altLang="en-US" sz="900" dirty="0" err="1">
-                <a:solidFill>
-                  <a:schemeClr val="tx1"/>
-                </a:solidFill>
-                <a:latin typeface="Arial" panose="020B0604020202020204" pitchFamily="34" charset="0"/>
-              </a:rPr>
-              <a:t>на</a:t>
-            </a:r>
-            <a:r>
-              <a:rPr lang="en-US" altLang="en-US" sz="900" dirty="0">
-                <a:solidFill>
-                  <a:schemeClr val="tx1"/>
-                </a:solidFill>
-                <a:latin typeface="Arial" panose="020B0604020202020204" pitchFamily="34" charset="0"/>
-              </a:rPr>
-              <a:t> </a:t>
-            </a:r>
-            <a:r>
-              <a:rPr lang="en-US" altLang="en-US" sz="900" dirty="0" err="1">
-                <a:solidFill>
-                  <a:schemeClr val="tx1"/>
-                </a:solidFill>
-                <a:latin typeface="Arial" panose="020B0604020202020204" pitchFamily="34" charset="0"/>
-              </a:rPr>
-              <a:t>этот</a:t>
-            </a:r>
-            <a:r>
-              <a:rPr lang="en-US" altLang="en-US" sz="900" dirty="0">
-                <a:solidFill>
-                  <a:schemeClr val="tx1"/>
-                </a:solidFill>
-                <a:latin typeface="Arial" panose="020B0604020202020204" pitchFamily="34" charset="0"/>
-              </a:rPr>
-              <a:t> </a:t>
-            </a:r>
-            <a:r>
-              <a:rPr lang="en-US" altLang="en-US" sz="900" dirty="0" err="1">
-                <a:solidFill>
-                  <a:schemeClr val="tx1"/>
-                </a:solidFill>
-                <a:latin typeface="Arial" panose="020B0604020202020204" pitchFamily="34" charset="0"/>
-              </a:rPr>
-              <a:t>интервал</a:t>
-            </a:r>
-            <a:endParaRPr lang="en-US" altLang="en-US" sz="900" dirty="0">
-              <a:solidFill>
-                <a:schemeClr val="tx1"/>
-              </a:solidFill>
-              <a:latin typeface="Arial" panose="020B0604020202020204" pitchFamily="34" charset="0"/>
-            </a:endParaRPr>
-          </a:p>
-          <a:p>
-            <a:pPr marL="0" lvl="0" indent="0" algn="l" eaLnBrk="0" fontAlgn="base" hangingPunct="0">
-              <a:spcBef>
-                <a:spcPct val="0"/>
-              </a:spcBef>
-              <a:spcAft>
-                <a:spcPct val="0"/>
-              </a:spcAft>
-              <a:buClrTx/>
-              <a:buSzTx/>
-              <a:buFontTx/>
-              <a:buChar char="•"/>
-            </a:pPr>
-            <a:r>
-              <a:rPr lang="en-US" altLang="en-US" sz="900" b="1" dirty="0">
-                <a:solidFill>
-                  <a:schemeClr val="tx1"/>
-                </a:solidFill>
-                <a:latin typeface="Arial" panose="020B0604020202020204" pitchFamily="34" charset="0"/>
-              </a:rPr>
-              <a:t>HYBRID_FORECAST_VALUE</a:t>
-            </a:r>
-            <a:r>
-              <a:rPr lang="en-US" altLang="en-US" sz="900" dirty="0">
-                <a:solidFill>
-                  <a:schemeClr val="tx1"/>
-                </a:solidFill>
-                <a:latin typeface="Arial" panose="020B0604020202020204" pitchFamily="34" charset="0"/>
-              </a:rPr>
-              <a:t> – </a:t>
-            </a:r>
-            <a:r>
-              <a:rPr lang="en-US" altLang="en-US" sz="900" dirty="0" err="1">
-                <a:solidFill>
-                  <a:schemeClr val="tx1"/>
-                </a:solidFill>
-                <a:latin typeface="Arial" panose="020B0604020202020204" pitchFamily="34" charset="0"/>
-              </a:rPr>
-              <a:t>дизаккумулированный</a:t>
-            </a:r>
-            <a:r>
-              <a:rPr lang="en-US" altLang="en-US" sz="900" dirty="0">
-                <a:solidFill>
-                  <a:schemeClr val="tx1"/>
-                </a:solidFill>
-                <a:latin typeface="Arial" panose="020B0604020202020204" pitchFamily="34" charset="0"/>
-              </a:rPr>
-              <a:t> </a:t>
-            </a:r>
-            <a:r>
-              <a:rPr lang="en-US" altLang="en-US" sz="900" dirty="0" err="1">
-                <a:solidFill>
-                  <a:schemeClr val="tx1"/>
-                </a:solidFill>
-                <a:latin typeface="Arial" panose="020B0604020202020204" pitchFamily="34" charset="0"/>
-              </a:rPr>
-              <a:t>объём</a:t>
-            </a:r>
-            <a:r>
-              <a:rPr lang="en-US" altLang="en-US" sz="900" dirty="0">
-                <a:solidFill>
-                  <a:schemeClr val="tx1"/>
-                </a:solidFill>
-                <a:latin typeface="Arial" panose="020B0604020202020204" pitchFamily="34" charset="0"/>
-              </a:rPr>
-              <a:t> </a:t>
-            </a:r>
-            <a:r>
-              <a:rPr lang="en-US" altLang="en-US" sz="900" dirty="0" err="1">
-                <a:solidFill>
-                  <a:schemeClr val="tx1"/>
-                </a:solidFill>
-                <a:latin typeface="Arial" panose="020B0604020202020204" pitchFamily="34" charset="0"/>
-              </a:rPr>
-              <a:t>гибридного</a:t>
-            </a:r>
-            <a:r>
-              <a:rPr lang="en-US" altLang="en-US" sz="900" dirty="0">
-                <a:solidFill>
-                  <a:schemeClr val="tx1"/>
-                </a:solidFill>
-                <a:latin typeface="Arial" panose="020B0604020202020204" pitchFamily="34" charset="0"/>
-              </a:rPr>
-              <a:t> </a:t>
-            </a:r>
-            <a:r>
-              <a:rPr lang="en-US" altLang="en-US" sz="900" dirty="0" err="1">
-                <a:solidFill>
-                  <a:schemeClr val="tx1"/>
-                </a:solidFill>
-                <a:latin typeface="Arial" panose="020B0604020202020204" pitchFamily="34" charset="0"/>
-              </a:rPr>
-              <a:t>прогноза</a:t>
-            </a:r>
-            <a:r>
-              <a:rPr lang="en-US" altLang="en-US" sz="900" dirty="0">
-                <a:solidFill>
-                  <a:schemeClr val="tx1"/>
-                </a:solidFill>
-                <a:latin typeface="Arial" panose="020B0604020202020204" pitchFamily="34" charset="0"/>
-              </a:rPr>
-              <a:t> </a:t>
-            </a:r>
-            <a:r>
-              <a:rPr lang="en-US" altLang="en-US" sz="900" dirty="0" err="1">
-                <a:solidFill>
-                  <a:schemeClr val="tx1"/>
-                </a:solidFill>
-                <a:latin typeface="Arial" panose="020B0604020202020204" pitchFamily="34" charset="0"/>
-              </a:rPr>
-              <a:t>на</a:t>
-            </a:r>
-            <a:r>
-              <a:rPr lang="en-US" altLang="en-US" sz="900" dirty="0">
-                <a:solidFill>
-                  <a:schemeClr val="tx1"/>
-                </a:solidFill>
-                <a:latin typeface="Arial" panose="020B0604020202020204" pitchFamily="34" charset="0"/>
-              </a:rPr>
-              <a:t> </a:t>
-            </a:r>
-            <a:r>
-              <a:rPr lang="en-US" altLang="en-US" sz="900" dirty="0" err="1">
-                <a:solidFill>
-                  <a:schemeClr val="tx1"/>
-                </a:solidFill>
-                <a:latin typeface="Arial" panose="020B0604020202020204" pitchFamily="34" charset="0"/>
-              </a:rPr>
-              <a:t>этот</a:t>
-            </a:r>
-            <a:r>
-              <a:rPr lang="en-US" altLang="en-US" sz="900" dirty="0">
-                <a:solidFill>
-                  <a:schemeClr val="tx1"/>
-                </a:solidFill>
-                <a:latin typeface="Arial" panose="020B0604020202020204" pitchFamily="34" charset="0"/>
-              </a:rPr>
-              <a:t> </a:t>
-            </a:r>
-            <a:r>
-              <a:rPr lang="en-US" altLang="en-US" sz="900" dirty="0" err="1">
-                <a:solidFill>
-                  <a:schemeClr val="tx1"/>
-                </a:solidFill>
-                <a:latin typeface="Arial" panose="020B0604020202020204" pitchFamily="34" charset="0"/>
-              </a:rPr>
-              <a:t>интерв</a:t>
-            </a:r>
-            <a:r>
-              <a:rPr lang="ru-RU" altLang="en-US" sz="900" dirty="0">
-                <a:solidFill>
-                  <a:schemeClr val="tx1"/>
-                </a:solidFill>
-                <a:latin typeface="Arial" panose="020B0604020202020204" pitchFamily="34" charset="0"/>
-              </a:rPr>
-              <a:t>ал.</a:t>
+              <a:rPr lang="en-US" sz="900" dirty="0"/>
+              <a:t>– disaggregated hybrid forecast volume for this interval</a:t>
             </a:r>
             <a:endParaRPr lang="en-US" altLang="en-US" sz="900" dirty="0">
               <a:solidFill>
@@ -9928,13 +9008,13 @@
   <p:clrMapOvr>
     <a:masterClrMapping/>
   </p:clrMapOvr>
-  <mc:AlternateContent xmlns:mc="http://schemas.openxmlformats.org/markup-compatibility/2006">
-    <mc:Choice xmlns:p14="http://schemas.microsoft.com/office/powerpoint/2010/main" Requires="p14">
+  <mc:AlternateContent xmlns:mc="http://schemas.openxmlformats.org/markup-compatibility/2006" xmlns:p14="http://schemas.microsoft.com/office/powerpoint/2010/main">
+    <mc:Choice Requires="p14">
       <p:transition spd="slow" p14:dur="3400">
         <p14:reveal/>
       </p:transition>
     </mc:Choice>
-    <mc:Fallback>
+    <mc:Fallback xmlns="">
       <p:transition spd="slow">
         <p:fade/>
       </p:transition>
@@ -9997,20 +9077,10 @@
           </a:bodyPr>
           <a:lstStyle/>
           <a:p>
-            <a:pPr marL="0" lvl="0" indent="0" algn="l" rtl="0">
-              <a:spcBef>
-                <a:spcPts val="0"/>
-              </a:spcBef>
-              <a:spcAft>
-                <a:spcPts val="0"/>
-              </a:spcAft>
-              <a:buNone/>
-            </a:pPr>
+            <a:pPr lvl="0"/>
             <a:r>
-              <a:rPr lang="ru-RU" dirty="0">
-                <a:latin typeface="Montserrat" panose="00000500000000000000" pitchFamily="2" charset="-52"/>
-              </a:rPr>
-              <a:t>Заключение</a:t>
+              <a:rPr lang="en-US" dirty="0"/>
+              <a:t>Conclusion</a:t>
             </a:r>
             <a:endParaRPr dirty="0">
               <a:latin typeface="Montserrat" panose="00000500000000000000" pitchFamily="2" charset="-52"/>
@@ -10036,8 +9106,8 @@
         </p:nvSpPr>
         <p:spPr bwMode="auto">
           <a:xfrm>
-            <a:off x="712788" y="1582173"/>
-            <a:ext cx="8113497" cy="2677656"/>
+            <a:off x="712788" y="1689895"/>
+            <a:ext cx="8113497" cy="2462213"/>
           </a:xfrm>
           <a:prstGeom prst="rect">
             <a:avLst/>
@@ -10085,88 +9155,44 @@
           </a:bodyPr>
           <a:lstStyle/>
           <a:p>
-            <a:pPr marL="114300" indent="0">
-              <a:buNone/>
-            </a:pPr>
             <a:r>
-              <a:rPr lang="ru-RU" sz="1400" b="1" dirty="0"/>
-              <a:t>Выводы:</a:t>
+              <a:rPr lang="en-US" sz="1400" b="1" dirty="0"/>
+              <a:t>Conclusions:</a:t>
+            </a:r>
+            <a:br>
+              <a:rPr lang="en-US" sz="1400" dirty="0"/>
+            </a:br>
+            <a:r>
+              <a:rPr lang="en-US" sz="1400" dirty="0"/>
+              <a:t>Implemented a forecast disaggregation module that converts an aggregated forecast into the target time granularity (DAY / WEEK.2).</a:t>
+            </a:r>
+            <a:br>
+              <a:rPr lang="en-US" sz="1400" dirty="0"/>
+            </a:br>
+            <a:r>
+              <a:rPr lang="en-US" sz="1400" dirty="0"/>
+              <a:t>Ensured correct allocation of values across days/weeks while preserving the total volume for each PRODUCT_ID–LOCATION_ID–… combination.</a:t>
+            </a:r>
+            <a:br>
+              <a:rPr lang="en-US" sz="1400" dirty="0"/>
+            </a:br>
+            <a:r>
+              <a:rPr lang="en-US" sz="1400" dirty="0"/>
+              <a:t>Validated the module on synthetic data and built “before/after” visualizations demonstrating the correctness of the disaggregation.</a:t>
             </a:r>
           </a:p>
           <a:p>
             <a:r>
-              <a:rPr lang="ru-RU" sz="1400" dirty="0"/>
-              <a:t>Реализовал модуль </a:t>
+              <a:rPr lang="en-US" sz="1400" b="1" dirty="0"/>
+              <a:t>How to improve the result:</a:t>
             </a:r>
+            <a:br>
+              <a:rPr lang="en-US" sz="1400" dirty="0"/>
+            </a:br>
             <a:r>
-              <a:rPr lang="ru-RU" sz="1400" dirty="0" err="1"/>
-              <a:t>дизаккумуляции</a:t>
+              <a:rPr lang="en-US" sz="1400" dirty="0"/>
+              <a:t>Add support for other time levels (e.g., 10-day periods, client financial weeks) and more flexible allocation logic (not only uniform by days, but also demand-weighted).</a:t>
             </a:r>
-            <a:r>
-              <a:rPr lang="ru-RU" sz="1400" dirty="0"/>
-              <a:t> прогноза, который преобразует агрегированный прогноз в целевую временную гранулярность (DAY / WEEK.2).</a:t>
-            </a:r>
-          </a:p>
-          <a:p>
-            <a:r>
-              <a:rPr lang="ru-RU" sz="1400" dirty="0"/>
-              <a:t>Обеспечил корректное распределение значений по дням/неделям с сохранением общего объёма по каждой комбинации </a:t>
-            </a:r>
-            <a:r>
-              <a:rPr lang="ru-RU" dirty="0"/>
-              <a:t>PRODUCT_ID–LOCATION_ID–…</a:t>
-            </a:r>
-            <a:r>
-              <a:rPr lang="ru-RU" sz="1400" dirty="0"/>
-              <a:t>.</a:t>
-            </a:r>
-          </a:p>
-          <a:p>
-            <a:r>
-              <a:rPr lang="ru-RU" sz="1400" dirty="0"/>
-              <a:t>Проверил работу модуля на синтетических данных, построил визуализации “до/после”, которые демонстрируют корректность </a:t>
-            </a:r>
-            <a:r>
-              <a:rPr lang="ru-RU" sz="1400" dirty="0" err="1"/>
-              <a:t>дизаккумуляции</a:t>
-            </a:r>
-            <a:r>
-              <a:rPr lang="ru-RU" sz="1400" dirty="0"/>
-              <a:t>.</a:t>
-            </a:r>
-          </a:p>
-          <a:p>
-            <a:pPr marL="114300" indent="0">
-              <a:buNone/>
-            </a:pPr>
-            <a:r>
-              <a:rPr lang="ru-RU" sz="1400" b="1" dirty="0"/>
-              <a:t>Как можно улучшить результат:</a:t>
-            </a:r>
-          </a:p>
-          <a:p>
-            <a:r>
-              <a:rPr lang="ru-RU" sz="1400" dirty="0"/>
-              <a:t>Добавить поддержку других временных уровней (например, декады, финансовые недели клиента) и более гибкой логики распределения (не только равномерно по дням, но и с учётом спроса).</a:t>
-            </a:r>
-          </a:p>
-          <a:p>
-            <a:pPr marL="0" indent="0" eaLnBrk="0" fontAlgn="base" hangingPunct="0">
-              <a:spcBef>
-                <a:spcPct val="0"/>
-              </a:spcBef>
-              <a:spcAft>
-                <a:spcPct val="0"/>
-              </a:spcAft>
-              <a:buClrTx/>
-              <a:buSzTx/>
-              <a:buNone/>
-            </a:pPr>
-            <a:endParaRPr lang="en-US" altLang="en-US" sz="1400" dirty="0">
-              <a:solidFill>
-                <a:schemeClr val="dk1"/>
-              </a:solidFill>
-            </a:endParaRPr>
           </a:p>
         </p:txBody>
       </p:sp>
@@ -10180,6 +9206,106 @@
   <p:clrMapOvr>
     <a:masterClrMapping/>
   </p:clrMapOvr>
+</p:sld>
+</file>
+
+<file path=ppt/slides/slide13.xml><?xml version="1.0" encoding="utf-8"?>
+<p:sld xmlns:a="http://schemas.openxmlformats.org/drawingml/2006/main" xmlns:r="http://schemas.openxmlformats.org/officeDocument/2006/relationships" xmlns:p="http://schemas.openxmlformats.org/presentationml/2006/main">
+  <p:cSld>
+    <p:spTree>
+      <p:nvGrpSpPr>
+        <p:cNvPr id="1" name="Shape 883">
+          <a:extLst>
+            <a:ext uri="{FF2B5EF4-FFF2-40B4-BE49-F238E27FC236}">
+              <a16:creationId xmlns:a16="http://schemas.microsoft.com/office/drawing/2014/main" id="{8DE60DD3-BCED-F1C9-30D9-C9AE5B9F9386}"/>
+            </a:ext>
+          </a:extLst>
+        </p:cNvPr>
+        <p:cNvGrpSpPr/>
+        <p:nvPr/>
+      </p:nvGrpSpPr>
+      <p:grpSpPr>
+        <a:xfrm>
+          <a:off x="0" y="0"/>
+          <a:ext cx="0" cy="0"/>
+          <a:chOff x="0" y="0"/>
+          <a:chExt cx="0" cy="0"/>
+        </a:xfrm>
+      </p:grpSpPr>
+      <p:sp>
+        <p:nvSpPr>
+          <p:cNvPr id="13" name="TextBox 12">
+            <a:extLst>
+              <a:ext uri="{FF2B5EF4-FFF2-40B4-BE49-F238E27FC236}">
+                <a16:creationId xmlns:a16="http://schemas.microsoft.com/office/drawing/2014/main" id="{731B6D0D-453A-1529-A784-EA11EBBD25BA}"/>
+              </a:ext>
+            </a:extLst>
+          </p:cNvPr>
+          <p:cNvSpPr txBox="1"/>
+          <p:nvPr/>
+        </p:nvSpPr>
+        <p:spPr>
+          <a:xfrm>
+            <a:off x="1123835" y="1802308"/>
+            <a:ext cx="6896330" cy="1538883"/>
+          </a:xfrm>
+          <a:prstGeom prst="rect">
+            <a:avLst/>
+          </a:prstGeom>
+          <a:noFill/>
+        </p:spPr>
+        <p:txBody>
+          <a:bodyPr wrap="square">
+            <a:spAutoFit/>
+          </a:bodyPr>
+          <a:lstStyle/>
+          <a:p>
+            <a:r>
+              <a:rPr lang="en-US" sz="5400" dirty="0">
+                <a:latin typeface="AlphabetSoup Tilt BT" panose="04020905020B06060204" pitchFamily="82" charset="0"/>
+              </a:rPr>
+              <a:t>L</a:t>
+            </a:r>
+            <a:r>
+              <a:rPr lang="en" sz="5400" dirty="0">
+                <a:latin typeface="AlphabetSoup Tilt BT" panose="04020905020B06060204" pitchFamily="82" charset="0"/>
+              </a:rPr>
+              <a:t>ink to github:</a:t>
+            </a:r>
+          </a:p>
+          <a:p>
+            <a:r>
+              <a:rPr lang="en-US" sz="2000" dirty="0">
+                <a:latin typeface="Andalus" panose="02020603050405020304" pitchFamily="18" charset="-78"/>
+                <a:cs typeface="Andalus" panose="02020603050405020304" pitchFamily="18" charset="-78"/>
+              </a:rPr>
+              <a:t>https://github.com/aromanenko/DFP/tree/Shub_Sergey_dqcheak%2Bdisaccumulation</a:t>
+            </a:r>
+          </a:p>
+        </p:txBody>
+      </p:sp>
+    </p:spTree>
+    <p:extLst>
+      <p:ext uri="{BB962C8B-B14F-4D97-AF65-F5344CB8AC3E}">
+        <p14:creationId xmlns:p14="http://schemas.microsoft.com/office/powerpoint/2010/main" val="1649399358"/>
+      </p:ext>
+    </p:extLst>
+  </p:cSld>
+  <p:clrMapOvr>
+    <a:masterClrMapping/>
+  </p:clrMapOvr>
+  <mc:AlternateContent xmlns:mc="http://schemas.openxmlformats.org/markup-compatibility/2006">
+    <mc:Choice xmlns:p14="http://schemas.microsoft.com/office/powerpoint/2010/main" Requires="p14">
+      <p:transition spd="slow" p14:dur="3400">
+        <p14:reveal/>
+      </p:transition>
+    </mc:Choice>
+    <mc:Fallback>
+      <p:transition spd="slow">
+        <p:fade/>
+      </p:transition>
+    </mc:Fallback>
+  </mc:AlternateContent>
 </p:sld>
 </file>
 
@@ -10300,8 +9426,8 @@
         </p:nvSpPr>
         <p:spPr>
           <a:xfrm>
-            <a:off x="343521" y="2416272"/>
-            <a:ext cx="1414154" cy="1815882"/>
+            <a:off x="343521" y="2342793"/>
+            <a:ext cx="1414154" cy="2092881"/>
           </a:xfrm>
           <a:prstGeom prst="rect">
             <a:avLst/>
@@ -10315,191 +9441,46 @@
           <a:lstStyle/>
           <a:p>
             <a:r>
-              <a:rPr lang="ru-RU" sz="800" b="1" dirty="0">
-                <a:solidFill>
-                  <a:schemeClr val="tx1"/>
-                </a:solidFill>
-                <a:latin typeface="Montserrat" panose="00000500000000000000" pitchFamily="2" charset="-52"/>
-                <a:cs typeface="Mongolian Baiti" panose="03000500000000000000" pitchFamily="66" charset="0"/>
-              </a:rPr>
-              <a:t>Что делает и зачем:</a:t>
+              <a:rPr lang="en-US" sz="1000" dirty="0"/>
+              <a:t>What it does and why:</a:t>
             </a:r>
           </a:p>
           <a:p>
-            <a:pPr marL="171450" indent="-171450">
-              <a:buFont typeface="Arial" panose="020B0604020202020204" pitchFamily="34" charset="0"/>
-              <a:buChar char="•"/>
-            </a:pPr>
             <a:r>
-              <a:rPr lang="ru-RU" sz="800" dirty="0">
-                <a:solidFill>
-                  <a:schemeClr val="tx1"/>
-                </a:solidFill>
-                <a:latin typeface="Montserrat" panose="00000500000000000000" pitchFamily="2" charset="-52"/>
-                <a:cs typeface="Mongolian Baiti" panose="03000500000000000000" pitchFamily="66" charset="0"/>
-              </a:rPr>
-              <a:t>Проверка наличия</a:t>
-            </a:r>
-            <a:r>
-              <a:rPr lang="en-US" sz="800" dirty="0">
-                <a:solidFill>
-                  <a:schemeClr val="tx1"/>
-                </a:solidFill>
-                <a:latin typeface="Montserrat" panose="00000500000000000000" pitchFamily="2" charset="-52"/>
-                <a:cs typeface="Mongolian Baiti" panose="03000500000000000000" pitchFamily="66" charset="0"/>
-              </a:rPr>
-              <a:t> </a:t>
-            </a:r>
-            <a:r>
-              <a:rPr lang="ru-RU" sz="800" dirty="0">
-                <a:solidFill>
-                  <a:schemeClr val="tx1"/>
-                </a:solidFill>
-                <a:latin typeface="Montserrat" panose="00000500000000000000" pitchFamily="2" charset="-52"/>
-                <a:cs typeface="Mongolian Baiti" panose="03000500000000000000" pitchFamily="66" charset="0"/>
-              </a:rPr>
-              <a:t>таблиц </a:t>
+              <a:rPr lang="en-US" sz="1000" dirty="0"/>
+              <a:t>Check that required tables exist</a:t>
             </a:r>
           </a:p>
           <a:p>
-            <a:pPr marL="171450" indent="-171450">
-              <a:buFont typeface="Arial" panose="020B0604020202020204" pitchFamily="34" charset="0"/>
-              <a:buChar char="•"/>
-            </a:pPr>
             <a:r>
-              <a:rPr lang="ru-RU" sz="800" dirty="0">
-                <a:solidFill>
-                  <a:schemeClr val="tx1"/>
-                </a:solidFill>
-                <a:latin typeface="Montserrat" panose="00000500000000000000" pitchFamily="2" charset="-52"/>
-                <a:cs typeface="Mongolian Baiti" panose="03000500000000000000" pitchFamily="66" charset="0"/>
-              </a:rPr>
-              <a:t>Проверка значений</a:t>
-            </a:r>
-            <a:r>
-              <a:rPr lang="en-US" sz="800" dirty="0">
-                <a:solidFill>
-                  <a:schemeClr val="tx1"/>
-                </a:solidFill>
-                <a:latin typeface="Montserrat" panose="00000500000000000000" pitchFamily="2" charset="-52"/>
-                <a:cs typeface="Mongolian Baiti" panose="03000500000000000000" pitchFamily="66" charset="0"/>
-              </a:rPr>
-              <a:t> </a:t>
-            </a:r>
-            <a:r>
-              <a:rPr lang="ru-RU" sz="800" dirty="0">
-                <a:solidFill>
-                  <a:schemeClr val="tx1"/>
-                </a:solidFill>
-                <a:latin typeface="Montserrat" panose="00000500000000000000" pitchFamily="2" charset="-52"/>
-                <a:cs typeface="Mongolian Baiti" panose="03000500000000000000" pitchFamily="66" charset="0"/>
-              </a:rPr>
-              <a:t>на </a:t>
-            </a:r>
-            <a:r>
-              <a:rPr lang="ru-RU" sz="800" dirty="0" err="1">
-                <a:solidFill>
-                  <a:schemeClr val="tx1"/>
-                </a:solidFill>
-                <a:latin typeface="Montserrat" panose="00000500000000000000" pitchFamily="2" charset="-52"/>
-                <a:cs typeface="Mongolian Baiti" panose="03000500000000000000" pitchFamily="66" charset="0"/>
-              </a:rPr>
-              <a:t>неотрицательность</a:t>
-            </a:r>
-            <a:endParaRPr lang="ru-RU" sz="800" dirty="0">
-              <a:solidFill>
-                <a:schemeClr val="tx1"/>
-              </a:solidFill>
-              <a:latin typeface="Montserrat" panose="00000500000000000000" pitchFamily="2" charset="-52"/>
-              <a:cs typeface="Mongolian Baiti" panose="03000500000000000000" pitchFamily="66" charset="0"/>
-            </a:endParaRPr>
-          </a:p>
-          <a:p>
-            <a:pPr marL="171450" indent="-171450">
-              <a:buFont typeface="Arial" panose="020B0604020202020204" pitchFamily="34" charset="0"/>
-              <a:buChar char="•"/>
-            </a:pPr>
-            <a:r>
-              <a:rPr lang="ru-RU" sz="800" dirty="0">
-                <a:solidFill>
-                  <a:schemeClr val="tx1"/>
-                </a:solidFill>
-                <a:latin typeface="Montserrat" panose="00000500000000000000" pitchFamily="2" charset="-52"/>
-                <a:cs typeface="Mongolian Baiti" panose="03000500000000000000" pitchFamily="66" charset="0"/>
-              </a:rPr>
-              <a:t>Кросс-проверка ключей</a:t>
+              <a:rPr lang="en-US" sz="1000" dirty="0"/>
+              <a:t>Validate values are non-negative</a:t>
             </a:r>
           </a:p>
           <a:p>
-            <a:pPr marL="171450" indent="-171450">
-              <a:buFont typeface="Arial" panose="020B0604020202020204" pitchFamily="34" charset="0"/>
-              <a:buChar char="•"/>
-            </a:pPr>
             <a:r>
-              <a:rPr lang="ru-RU" sz="800" dirty="0">
-                <a:solidFill>
-                  <a:schemeClr val="tx1"/>
-                </a:solidFill>
-                <a:latin typeface="Montserrat" panose="00000500000000000000" pitchFamily="2" charset="-52"/>
-                <a:cs typeface="Mongolian Baiti" panose="03000500000000000000" pitchFamily="66" charset="0"/>
-              </a:rPr>
-              <a:t>Временная кросс-проверка</a:t>
+              <a:rPr lang="en-US" sz="1000" dirty="0"/>
+              <a:t>Cross-check keys</a:t>
             </a:r>
-            <a:endParaRPr lang="en-US" sz="800" dirty="0">
-              <a:solidFill>
-                <a:schemeClr val="tx1"/>
-              </a:solidFill>
-              <a:latin typeface="Montserrat" panose="00000500000000000000" pitchFamily="2" charset="-52"/>
-              <a:cs typeface="Mongolian Baiti" panose="03000500000000000000" pitchFamily="66" charset="0"/>
-            </a:endParaRPr>
           </a:p>
           <a:p>
             <a:r>
-              <a:rPr lang="ru-RU" sz="800" b="1" dirty="0">
-                <a:solidFill>
-                  <a:schemeClr val="tx1"/>
-                </a:solidFill>
-                <a:latin typeface="Montserrat" panose="00000500000000000000" pitchFamily="2" charset="-52"/>
-                <a:cs typeface="Mongolian Baiti" panose="03000500000000000000" pitchFamily="66" charset="0"/>
-              </a:rPr>
-              <a:t>Зачем нужно:</a:t>
+              <a:rPr lang="en-US" sz="1000" dirty="0"/>
+              <a:t>Temporal cross-check</a:t>
+            </a:r>
+          </a:p>
+          <a:p>
+            <a:r>
+              <a:rPr lang="en-US" sz="1000" dirty="0"/>
+              <a:t>Why it’s needed:</a:t>
             </a:r>
             <a:br>
-              <a:rPr lang="ru-RU" sz="800" dirty="0">
-                <a:solidFill>
-                  <a:schemeClr val="tx1"/>
-                </a:solidFill>
-                <a:latin typeface="Montserrat" panose="00000500000000000000" pitchFamily="2" charset="-52"/>
-                <a:cs typeface="Mongolian Baiti" panose="03000500000000000000" pitchFamily="66" charset="0"/>
-              </a:rPr>
+              <a:rPr lang="en-US" sz="1000" dirty="0"/>
             </a:br>
             <a:r>
-              <a:rPr lang="ru-RU" sz="800" dirty="0">
-                <a:solidFill>
-                  <a:schemeClr val="tx1"/>
-                </a:solidFill>
-                <a:latin typeface="Montserrat" panose="00000500000000000000" pitchFamily="2" charset="-52"/>
-                <a:cs typeface="Mongolian Baiti" panose="03000500000000000000" pitchFamily="66" charset="0"/>
-              </a:rPr>
-              <a:t>чтобы не пускать “битые” данные дальше по </a:t>
+              <a:rPr lang="en-US" sz="1000" dirty="0"/>
+              <a:t>to prevent “broken” data from going further in the pipeline</a:t>
             </a:r>
-            <a:r>
-              <a:rPr lang="ru-RU" sz="800" dirty="0" err="1">
-                <a:solidFill>
-                  <a:schemeClr val="tx1"/>
-                </a:solidFill>
-                <a:latin typeface="Montserrat" panose="00000500000000000000" pitchFamily="2" charset="-52"/>
-                <a:cs typeface="Mongolian Baiti" panose="03000500000000000000" pitchFamily="66" charset="0"/>
-              </a:rPr>
-              <a:t>пайплайну</a:t>
-            </a:r>
-            <a:endParaRPr lang="en-US" sz="800" dirty="0">
-              <a:solidFill>
-                <a:schemeClr val="tx1"/>
-              </a:solidFill>
-              <a:latin typeface="Montserrat" panose="00000500000000000000" pitchFamily="2" charset="-52"/>
-              <a:cs typeface="Mongolian Baiti" panose="03000500000000000000" pitchFamily="66" charset="0"/>
-            </a:endParaRPr>
           </a:p>
         </p:txBody>
       </p:sp>
@@ -10521,12 +9502,16 @@
         </p:nvSpPr>
         <p:spPr>
           <a:xfrm>
-            <a:off x="311700" y="345057"/>
+            <a:off x="278352" y="345057"/>
             <a:ext cx="8520600" cy="572700"/>
           </a:xfrm>
           <a:prstGeom prst="rect">
             <a:avLst/>
           </a:prstGeom>
+          <a:noFill/>
+          <a:ln>
+            <a:noFill/>
+          </a:ln>
         </p:spPr>
         <p:txBody>
           <a:bodyPr spcFirstLastPara="1" wrap="square" lIns="91425" tIns="91425" rIns="91425" bIns="91425" anchor="t" anchorCtr="0">
@@ -10534,24 +9519,23 @@
           </a:bodyPr>
           <a:lstStyle/>
           <a:p>
-            <a:pPr marL="0" lvl="0" indent="0" algn="l" rtl="0">
-              <a:spcBef>
-                <a:spcPts val="0"/>
-              </a:spcBef>
-              <a:spcAft>
-                <a:spcPts val="0"/>
-              </a:spcAft>
-              <a:buNone/>
+            <a:pPr marL="457200" indent="-342900">
+              <a:buClr>
+                <a:schemeClr val="dk2"/>
+              </a:buClr>
+              <a:buSzPts val="1400"/>
+              <a:buFont typeface="Montserrat"/>
             </a:pPr>
             <a:r>
-              <a:rPr lang="en" dirty="0">
-                <a:latin typeface="Montserrat" panose="00000500000000000000" pitchFamily="2" charset="-52"/>
+              <a:rPr lang="en-US" sz="2800" dirty="0">
+                <a:solidFill>
+                  <a:schemeClr val="dk2"/>
+                </a:solidFill>
+                <a:latin typeface="Montserrat"/>
+                <a:sym typeface="Montserrat"/>
               </a:rPr>
-              <a:t>e2e процесс прогнзировния спроса</a:t>
+              <a:t>end-to-end demand forecasting process</a:t>
             </a:r>
-            <a:endParaRPr dirty="0">
-              <a:latin typeface="Montserrat" panose="00000500000000000000" pitchFamily="2" charset="-52"/>
-            </a:endParaRPr>
           </a:p>
         </p:txBody>
       </p:sp>
@@ -10617,12 +9601,10 @@
           </a:bodyPr>
           <a:lstStyle/>
           <a:p>
-            <a:pPr lvl="0"/>
             <a:r>
-              <a:rPr lang="en" dirty="0"/>
-              <a:t>Данные на входе шага</a:t>
+              <a:rPr lang="en-US" dirty="0"/>
+              <a:t>Input data for the step</a:t>
             </a:r>
-            <a:endParaRPr dirty="0"/>
           </a:p>
         </p:txBody>
       </p:sp>
@@ -10657,12 +9639,10 @@
           </a:bodyPr>
           <a:lstStyle/>
           <a:p>
-            <a:pPr marL="0" lvl="0" indent="0"/>
             <a:r>
-              <a:rPr lang="ru-RU" dirty="0"/>
-              <a:t>Числовые показатели</a:t>
+              <a:rPr lang="en-US" dirty="0"/>
+              <a:t>Numeric metrics</a:t>
             </a:r>
-            <a:endParaRPr dirty="0"/>
           </a:p>
         </p:txBody>
       </p:sp>
@@ -10684,7 +9664,7 @@
         </p:nvSpPr>
         <p:spPr>
           <a:xfrm>
-            <a:off x="3509025" y="2948247"/>
+            <a:off x="3294025" y="2948247"/>
             <a:ext cx="2555750" cy="813000"/>
           </a:xfrm>
           <a:prstGeom prst="rect">
@@ -10697,7 +9677,6 @@
           </a:bodyPr>
           <a:lstStyle/>
           <a:p>
-            <a:pPr marL="0" lvl="0" indent="0"/>
             <a:r>
               <a:rPr lang="en-US" dirty="0"/>
               <a:t>SALES_QTY, STOCK_QTY, SELL_IN_QTY, SELL_OUT_QTY, PRICE, PROMO_PRICE </a:t>
@@ -10708,17 +9687,8 @@
             </a:r>
             <a:r>
               <a:rPr lang="en-US" dirty="0"/>
-              <a:t> </a:t>
+              <a:t> non-negativity checks</a:t>
             </a:r>
-            <a:r>
-              <a:rPr lang="ru-RU" dirty="0"/>
-              <a:t>проверки на </a:t>
-            </a:r>
-            <a:r>
-              <a:rPr lang="ru-RU" dirty="0" err="1"/>
-              <a:t>неотрицательность</a:t>
-            </a:r>
-            <a:endParaRPr dirty="0"/>
           </a:p>
         </p:txBody>
       </p:sp>
@@ -10753,12 +9723,10 @@
           </a:bodyPr>
           <a:lstStyle/>
           <a:p>
-            <a:pPr marL="0" lvl="0" indent="0"/>
             <a:r>
-              <a:rPr lang="ru-RU" dirty="0"/>
-              <a:t>Набор таблиц</a:t>
+              <a:rPr lang="en-US" dirty="0"/>
+              <a:t>Set of tables</a:t>
             </a:r>
-            <a:endParaRPr dirty="0"/>
           </a:p>
         </p:txBody>
       </p:sp>
@@ -10793,24 +9761,19 @@
           </a:bodyPr>
           <a:lstStyle/>
           <a:p>
-            <a:pPr marL="0" lvl="0" indent="0"/>
+            <a:pPr algn="l"/>
             <a:r>
               <a:rPr lang="en-US" dirty="0"/>
-              <a:t>DDS-</a:t>
+              <a:t>Client DDS tables in the IN_</a:t>
             </a:r>
             <a:r>
-              <a:rPr lang="ru-RU" dirty="0"/>
-              <a:t>таблицы клиента формата IN_*.</a:t>
+              <a:rPr lang="en-US" i="1" dirty="0"/>
+              <a:t>.(DPS_</a:t>
             </a:r>
             <a:r>
               <a:rPr lang="en-US" dirty="0"/>
-              <a:t>(DPS_*)</a:t>
+              <a:t>) format, which we validate for data quality</a:t>
             </a:r>
-            <a:r>
-              <a:rPr lang="ru-RU" dirty="0"/>
-              <a:t>, которые мы проверяем на качество</a:t>
-            </a:r>
-            <a:endParaRPr dirty="0"/>
           </a:p>
         </p:txBody>
       </p:sp>
@@ -10832,8 +9795,8 @@
         </p:nvSpPr>
         <p:spPr>
           <a:xfrm>
-            <a:off x="6064875" y="2532051"/>
-            <a:ext cx="2126100" cy="444000"/>
+            <a:off x="6064775" y="2532051"/>
+            <a:ext cx="2126200" cy="444000"/>
           </a:xfrm>
           <a:prstGeom prst="rect">
             <a:avLst/>
@@ -10845,12 +9808,10 @@
           </a:bodyPr>
           <a:lstStyle/>
           <a:p>
-            <a:pPr marL="0" lvl="0" indent="0"/>
             <a:r>
-              <a:rPr lang="ru-RU" dirty="0"/>
-              <a:t>Ключи и календарь</a:t>
+              <a:rPr lang="en-US" dirty="0"/>
+              <a:t>Keys and calendar</a:t>
             </a:r>
-            <a:endParaRPr dirty="0"/>
           </a:p>
         </p:txBody>
       </p:sp>
@@ -10888,19 +9849,7 @@
             <a:pPr marL="0" lvl="0" indent="0"/>
             <a:r>
               <a:rPr lang="en-US" dirty="0"/>
-              <a:t>PRODUCT_ID, LOCATION_ID, CUSTOMER_ID, DISTR_CHANNEL_ID, PERIOD_DT </a:t>
-            </a:r>
-            <a:r>
-              <a:rPr lang="ru-RU" dirty="0"/>
-              <a:t>-</a:t>
-            </a:r>
-            <a:r>
-              <a:rPr lang="en-US" dirty="0"/>
-              <a:t> </a:t>
-            </a:r>
-            <a:r>
-              <a:rPr lang="ru-RU" dirty="0"/>
-              <a:t>основа кросс-проверок по связям и временным провалам</a:t>
+              <a:t>PRODUCT_ID, LOCATION_ID, CUSTOMER_ID, DISTR_CHANNEL_ID, PERIOD_DT are the basis for cross-checks across relationships and time gaps.</a:t>
             </a:r>
             <a:endParaRPr dirty="0"/>
           </a:p>
@@ -12611,20 +11560,10 @@
           </a:bodyPr>
           <a:lstStyle/>
           <a:p>
-            <a:pPr lvl="0"/>
             <a:r>
-              <a:rPr lang="en" dirty="0"/>
-              <a:t>Данные на </a:t>
+              <a:rPr lang="en-US" dirty="0"/>
+              <a:t>Output data for the step</a:t>
             </a:r>
-            <a:r>
-              <a:rPr lang="ru-RU" dirty="0"/>
-              <a:t>выходе</a:t>
-            </a:r>
-            <a:r>
-              <a:rPr lang="en" dirty="0"/>
-              <a:t> шага</a:t>
-            </a:r>
-            <a:endParaRPr dirty="0"/>
           </a:p>
         </p:txBody>
       </p:sp>
@@ -12795,7 +11734,6 @@
               <a:rPr lang="ru-RU" sz="900" dirty="0"/>
               <a:t>исходная таблица, из которой пришла проблемная строка</a:t>
             </a:r>
-            <a:endParaRPr lang="en-US" sz="900" dirty="0"/>
           </a:p>
           <a:p>
             <a:r>
@@ -12856,6 +11794,10 @@
               <a:rPr lang="ru-RU" sz="900" dirty="0"/>
               <a:t>краткое текстовое описание проблемы (для человека)</a:t>
             </a:r>
+          </a:p>
+          <a:p>
+            <a:pPr marL="0" lvl="0" indent="0"/>
+            <a:endParaRPr lang="ru-RU" sz="900" dirty="0"/>
           </a:p>
           <a:p>
             <a:pPr marL="0" lvl="0" indent="0"/>
@@ -13419,13 +12361,13 @@
   <p:clrMapOvr>
     <a:masterClrMapping/>
   </p:clrMapOvr>
-  <mc:AlternateContent xmlns:mc="http://schemas.openxmlformats.org/markup-compatibility/2006">
-    <mc:Choice xmlns:p14="http://schemas.microsoft.com/office/powerpoint/2010/main" Requires="p14">
+  <mc:AlternateContent xmlns:mc="http://schemas.openxmlformats.org/markup-compatibility/2006" xmlns:p14="http://schemas.microsoft.com/office/powerpoint/2010/main">
+    <mc:Choice Requires="p14">
       <p:transition spd="slow" p14:dur="3400">
         <p14:reveal/>
       </p:transition>
     </mc:Choice>
-    <mc:Fallback>
+    <mc:Fallback xmlns="">
       <p:transition spd="slow">
         <p:fade/>
       </p:transition>
@@ -13498,8 +12440,8 @@
               <a:buNone/>
             </a:pPr>
             <a:r>
-              <a:rPr lang="ru-RU" dirty="0"/>
-              <a:t>Заключение</a:t>
+              <a:rPr lang="en-US" dirty="0"/>
+              <a:t>Conclusion</a:t>
             </a:r>
             <a:endParaRPr dirty="0"/>
           </a:p>
@@ -13523,8 +12465,8 @@
         </p:nvSpPr>
         <p:spPr bwMode="auto">
           <a:xfrm>
-            <a:off x="712788" y="1366729"/>
-            <a:ext cx="8113497" cy="3108543"/>
+            <a:off x="712788" y="1582173"/>
+            <a:ext cx="8113497" cy="2677656"/>
           </a:xfrm>
           <a:prstGeom prst="rect">
             <a:avLst/>
@@ -13572,1368 +12514,50 @@
           </a:bodyPr>
           <a:lstStyle/>
           <a:p>
-            <a:pPr marL="0" indent="0" eaLnBrk="0" fontAlgn="base" hangingPunct="0">
-              <a:spcBef>
-                <a:spcPct val="0"/>
-              </a:spcBef>
-              <a:spcAft>
-                <a:spcPct val="0"/>
-              </a:spcAft>
-              <a:buClrTx/>
-              <a:buSzTx/>
-              <a:buNone/>
-            </a:pPr>
             <a:r>
-              <a:rPr lang="ru-RU" altLang="en-US" sz="1400" b="1" dirty="0">
-                <a:solidFill>
-                  <a:schemeClr val="dk1"/>
-                </a:solidFill>
-              </a:rPr>
-              <a:t>Выводы:</a:t>
+              <a:rPr lang="en-US" sz="1400" b="1" dirty="0"/>
+              <a:t>Conclusions:</a:t>
             </a:r>
-            <a:endParaRPr lang="en-US" altLang="en-US" sz="1400" b="1" dirty="0">
-              <a:solidFill>
-                <a:schemeClr val="dk1"/>
-              </a:solidFill>
-            </a:endParaRPr>
-          </a:p>
-          <a:p>
-            <a:pPr marL="171450" indent="-171450" eaLnBrk="0" fontAlgn="base" hangingPunct="0">
-              <a:spcBef>
-                <a:spcPct val="0"/>
-              </a:spcBef>
-              <a:spcAft>
-                <a:spcPct val="0"/>
-              </a:spcAft>
-              <a:buClrTx/>
-              <a:buSzTx/>
-            </a:pPr>
+            <a:br>
+              <a:rPr lang="en-US" sz="1400" dirty="0"/>
+            </a:br>
             <a:r>
-              <a:rPr lang="en-US" altLang="en-US" sz="1400" dirty="0" err="1">
-                <a:solidFill>
-                  <a:schemeClr val="dk1"/>
-                </a:solidFill>
-              </a:rPr>
-              <a:t>Реализовал</a:t>
+              <a:rPr lang="en-US" sz="1400" dirty="0"/>
+              <a:t>Implemented a DQ validation module for incoming DDS tables that automatically detects negative values, inconsistent keys, and temporal gaps between facts.</a:t>
             </a:r>
+            <a:br>
+              <a:rPr lang="en-US" sz="1400" dirty="0"/>
+            </a:br>
             <a:r>
-              <a:rPr lang="en-US" altLang="en-US" sz="1400" dirty="0">
-                <a:solidFill>
-                  <a:schemeClr val="dk1"/>
-                </a:solidFill>
-              </a:rPr>
-              <a:t> </a:t>
+              <a:rPr lang="en-US" sz="1400" dirty="0"/>
+              <a:t>Built a single consolidated output report, DATA_QUALITY_OUTPUT, where each row represents a specific issue with the object, period, table, and error type.</a:t>
             </a:r>
+            <a:br>
+              <a:rPr lang="en-US" sz="1400" dirty="0"/>
+            </a:br>
             <a:r>
-              <a:rPr lang="en-US" altLang="en-US" sz="1400" dirty="0" err="1">
-                <a:solidFill>
-                  <a:schemeClr val="dk1"/>
-                </a:solidFill>
-              </a:rPr>
-              <a:t>модуль</a:t>
-            </a:r>
-            <a:r>
-              <a:rPr lang="en-US" altLang="en-US" sz="1400" dirty="0">
-                <a:solidFill>
-                  <a:schemeClr val="dk1"/>
-                </a:solidFill>
-              </a:rPr>
-              <a:t> DQ-</a:t>
-            </a:r>
-            <a:r>
-              <a:rPr lang="en-US" altLang="en-US" sz="1400" dirty="0" err="1">
-                <a:solidFill>
-                  <a:schemeClr val="dk1"/>
-                </a:solidFill>
-              </a:rPr>
-              <a:t>проверок</a:t>
-            </a:r>
-            <a:r>
-              <a:rPr lang="en-US" altLang="en-US" sz="1400" dirty="0">
-                <a:solidFill>
-                  <a:schemeClr val="dk1"/>
-                </a:solidFill>
-              </a:rPr>
-              <a:t> </a:t>
-            </a:r>
-            <a:r>
-              <a:rPr lang="en-US" altLang="en-US" sz="1400" dirty="0" err="1">
-                <a:solidFill>
-                  <a:schemeClr val="dk1"/>
-                </a:solidFill>
-              </a:rPr>
-              <a:t>входных</a:t>
-            </a:r>
-            <a:r>
-              <a:rPr lang="en-US" altLang="en-US" sz="1400" dirty="0">
-                <a:solidFill>
-                  <a:schemeClr val="dk1"/>
-                </a:solidFill>
-              </a:rPr>
-              <a:t> DDS-</a:t>
-            </a:r>
-            <a:r>
-              <a:rPr lang="en-US" altLang="en-US" sz="1400" dirty="0" err="1">
-                <a:solidFill>
-                  <a:schemeClr val="dk1"/>
-                </a:solidFill>
-              </a:rPr>
-              <a:t>таблиц</a:t>
-            </a:r>
-            <a:r>
-              <a:rPr lang="en-US" altLang="en-US" sz="1400" dirty="0">
-                <a:solidFill>
-                  <a:schemeClr val="dk1"/>
-                </a:solidFill>
-              </a:rPr>
-              <a:t>, </a:t>
-            </a:r>
-            <a:r>
-              <a:rPr lang="en-US" altLang="en-US" sz="1400" dirty="0" err="1">
-                <a:solidFill>
-                  <a:schemeClr val="dk1"/>
-                </a:solidFill>
-              </a:rPr>
-              <a:t>который</a:t>
-            </a:r>
-            <a:r>
-              <a:rPr lang="en-US" altLang="en-US" sz="1400" dirty="0">
-                <a:solidFill>
-                  <a:schemeClr val="dk1"/>
-                </a:solidFill>
-              </a:rPr>
-              <a:t> </a:t>
-            </a:r>
-            <a:r>
-              <a:rPr lang="en-US" altLang="en-US" sz="1400" dirty="0" err="1">
-                <a:solidFill>
-                  <a:schemeClr val="dk1"/>
-                </a:solidFill>
-              </a:rPr>
-              <a:t>автоматически</a:t>
-            </a:r>
-            <a:r>
-              <a:rPr lang="en-US" altLang="en-US" sz="1400" dirty="0">
-                <a:solidFill>
-                  <a:schemeClr val="dk1"/>
-                </a:solidFill>
-              </a:rPr>
-              <a:t> </a:t>
-            </a:r>
-            <a:r>
-              <a:rPr lang="en-US" altLang="en-US" sz="1400" dirty="0" err="1">
-                <a:solidFill>
-                  <a:schemeClr val="dk1"/>
-                </a:solidFill>
-              </a:rPr>
-              <a:t>ищет</a:t>
-            </a:r>
-            <a:r>
-              <a:rPr lang="en-US" altLang="en-US" sz="1400" dirty="0">
-                <a:solidFill>
-                  <a:schemeClr val="dk1"/>
-                </a:solidFill>
-              </a:rPr>
-              <a:t> </a:t>
-            </a:r>
-            <a:r>
-              <a:rPr lang="en-US" altLang="en-US" sz="1400" dirty="0" err="1">
-                <a:solidFill>
-                  <a:schemeClr val="dk1"/>
-                </a:solidFill>
-              </a:rPr>
-              <a:t>отрицательные</a:t>
-            </a:r>
-            <a:r>
-              <a:rPr lang="en-US" altLang="en-US" sz="1400" dirty="0">
-                <a:solidFill>
-                  <a:schemeClr val="dk1"/>
-                </a:solidFill>
-              </a:rPr>
-              <a:t> </a:t>
-            </a:r>
-            <a:r>
-              <a:rPr lang="en-US" altLang="en-US" sz="1400" dirty="0" err="1">
-                <a:solidFill>
-                  <a:schemeClr val="dk1"/>
-                </a:solidFill>
-              </a:rPr>
-              <a:t>значения</a:t>
-            </a:r>
-            <a:r>
-              <a:rPr lang="en-US" altLang="en-US" sz="1400" dirty="0">
-                <a:solidFill>
-                  <a:schemeClr val="dk1"/>
-                </a:solidFill>
-              </a:rPr>
-              <a:t>, </a:t>
-            </a:r>
-            <a:r>
-              <a:rPr lang="en-US" altLang="en-US" sz="1400" dirty="0" err="1">
-                <a:solidFill>
-                  <a:schemeClr val="dk1"/>
-                </a:solidFill>
-              </a:rPr>
-              <a:t>несогласованные</a:t>
-            </a:r>
-            <a:r>
-              <a:rPr lang="en-US" altLang="en-US" sz="1400" dirty="0">
-                <a:solidFill>
-                  <a:schemeClr val="dk1"/>
-                </a:solidFill>
-              </a:rPr>
-              <a:t> </a:t>
-            </a:r>
-            <a:r>
-              <a:rPr lang="en-US" altLang="en-US" sz="1400" dirty="0" err="1">
-                <a:solidFill>
-                  <a:schemeClr val="dk1"/>
-                </a:solidFill>
-              </a:rPr>
-              <a:t>ключи</a:t>
-            </a:r>
-            <a:r>
-              <a:rPr lang="en-US" altLang="en-US" sz="1400" dirty="0">
-                <a:solidFill>
-                  <a:schemeClr val="dk1"/>
-                </a:solidFill>
-              </a:rPr>
-              <a:t> и </a:t>
-            </a:r>
-            <a:r>
-              <a:rPr lang="en-US" altLang="en-US" sz="1400" dirty="0" err="1">
-                <a:solidFill>
-                  <a:schemeClr val="dk1"/>
-                </a:solidFill>
-              </a:rPr>
-              <a:t>временные</a:t>
-            </a:r>
-            <a:r>
-              <a:rPr lang="en-US" altLang="en-US" sz="1400" dirty="0">
-                <a:solidFill>
-                  <a:schemeClr val="dk1"/>
-                </a:solidFill>
-              </a:rPr>
-              <a:t> </a:t>
-            </a:r>
-            <a:r>
-              <a:rPr lang="en-US" altLang="en-US" sz="1400" dirty="0" err="1">
-                <a:solidFill>
-                  <a:schemeClr val="dk1"/>
-                </a:solidFill>
-              </a:rPr>
-              <a:t>провалы</a:t>
-            </a:r>
-            <a:r>
-              <a:rPr lang="en-US" altLang="en-US" sz="1400" dirty="0">
-                <a:solidFill>
-                  <a:schemeClr val="dk1"/>
-                </a:solidFill>
-              </a:rPr>
-              <a:t> </a:t>
-            </a:r>
-            <a:r>
-              <a:rPr lang="en-US" altLang="en-US" sz="1400" dirty="0" err="1">
-                <a:solidFill>
-                  <a:schemeClr val="dk1"/>
-                </a:solidFill>
-              </a:rPr>
-              <a:t>между</a:t>
-            </a:r>
-            <a:r>
-              <a:rPr lang="en-US" altLang="en-US" sz="1400" dirty="0">
-                <a:solidFill>
-                  <a:schemeClr val="dk1"/>
-                </a:solidFill>
-              </a:rPr>
-              <a:t> </a:t>
-            </a:r>
-            <a:r>
-              <a:rPr lang="en-US" altLang="en-US" sz="1400" dirty="0" err="1">
-                <a:solidFill>
-                  <a:schemeClr val="dk1"/>
-                </a:solidFill>
-              </a:rPr>
-              <a:t>фактами</a:t>
-            </a:r>
-            <a:r>
-              <a:rPr lang="en-US" altLang="en-US" sz="1400" dirty="0">
-                <a:solidFill>
-                  <a:schemeClr val="dk1"/>
-                </a:solidFill>
-              </a:rPr>
-              <a:t>.</a:t>
+              <a:rPr lang="en-US" sz="1400" dirty="0"/>
+              <a:t>Validated it on synthetic and real data; built aggregates and visualizations that show the distribution of issues by table and type and allow a quick “health check” of the dataset before model training.</a:t>
             </a:r>
           </a:p>
           <a:p>
-            <a:pPr marL="171450" indent="-171450" eaLnBrk="0" fontAlgn="base" hangingPunct="0">
-              <a:spcBef>
-                <a:spcPct val="0"/>
-              </a:spcBef>
-              <a:spcAft>
-                <a:spcPct val="0"/>
-              </a:spcAft>
-              <a:buClrTx/>
-              <a:buSzTx/>
-            </a:pPr>
             <a:r>
-              <a:rPr lang="en-US" altLang="en-US" sz="1400" dirty="0" err="1">
-                <a:solidFill>
-                  <a:schemeClr val="dk1"/>
-                </a:solidFill>
-              </a:rPr>
-              <a:t>Сформировал</a:t>
+              <a:rPr lang="en-US" sz="1400" b="1" dirty="0"/>
+              <a:t>How to improve the result:</a:t>
             </a:r>
+            <a:br>
+              <a:rPr lang="en-US" sz="1400" dirty="0"/>
+            </a:br>
             <a:r>
-              <a:rPr lang="en-US" altLang="en-US" sz="1400" dirty="0">
-                <a:solidFill>
-                  <a:schemeClr val="dk1"/>
-                </a:solidFill>
-              </a:rPr>
-              <a:t> </a:t>
+              <a:rPr lang="en-US" sz="1400" dirty="0"/>
+              <a:t>Add business-level DQ rules (thresholds for sales/prices, anomalous spike values).</a:t>
             </a:r>
+            <a:br>
+              <a:rPr lang="en-US" sz="1400" dirty="0"/>
+            </a:br>
             <a:r>
-              <a:rPr lang="en-US" altLang="en-US" sz="1400" dirty="0" err="1">
-                <a:solidFill>
-                  <a:schemeClr val="dk1"/>
-                </a:solidFill>
-              </a:rPr>
-              <a:t>единый</a:t>
-            </a:r>
-            <a:r>
-              <a:rPr lang="en-US" altLang="en-US" sz="1400" dirty="0">
-                <a:solidFill>
-                  <a:schemeClr val="dk1"/>
-                </a:solidFill>
-              </a:rPr>
-              <a:t> </a:t>
-            </a:r>
-            <a:r>
-              <a:rPr lang="en-US" altLang="en-US" sz="1400" dirty="0" err="1">
-                <a:solidFill>
-                  <a:schemeClr val="dk1"/>
-                </a:solidFill>
-              </a:rPr>
-              <a:t>выходной</a:t>
-            </a:r>
-            <a:r>
-              <a:rPr lang="en-US" altLang="en-US" sz="1400" dirty="0">
-                <a:solidFill>
-                  <a:schemeClr val="dk1"/>
-                </a:solidFill>
-              </a:rPr>
-              <a:t> </a:t>
-            </a:r>
-            <a:r>
-              <a:rPr lang="en-US" altLang="en-US" sz="1400" dirty="0" err="1">
-                <a:solidFill>
-                  <a:schemeClr val="dk1"/>
-                </a:solidFill>
-              </a:rPr>
-              <a:t>отчёт</a:t>
-            </a:r>
-            <a:r>
-              <a:rPr lang="en-US" altLang="en-US" sz="1400" dirty="0">
-                <a:solidFill>
-                  <a:schemeClr val="dk1"/>
-                </a:solidFill>
-              </a:rPr>
-              <a:t> DATA_QUALITY_OUTPUT, </a:t>
-            </a:r>
-            <a:r>
-              <a:rPr lang="en-US" altLang="en-US" sz="1400" dirty="0" err="1">
-                <a:solidFill>
-                  <a:schemeClr val="dk1"/>
-                </a:solidFill>
-              </a:rPr>
-              <a:t>где</a:t>
-            </a:r>
-            <a:r>
-              <a:rPr lang="en-US" altLang="en-US" sz="1400" dirty="0">
-                <a:solidFill>
-                  <a:schemeClr val="dk1"/>
-                </a:solidFill>
-              </a:rPr>
-              <a:t> </a:t>
-            </a:r>
-            <a:r>
-              <a:rPr lang="en-US" altLang="en-US" sz="1400" dirty="0" err="1">
-                <a:solidFill>
-                  <a:schemeClr val="dk1"/>
-                </a:solidFill>
-              </a:rPr>
-              <a:t>каждая</a:t>
-            </a:r>
-            <a:r>
-              <a:rPr lang="en-US" altLang="en-US" sz="1400" dirty="0">
-                <a:solidFill>
-                  <a:schemeClr val="dk1"/>
-                </a:solidFill>
-              </a:rPr>
-              <a:t> </a:t>
-            </a:r>
-            <a:r>
-              <a:rPr lang="en-US" altLang="en-US" sz="1400" dirty="0" err="1">
-                <a:solidFill>
-                  <a:schemeClr val="dk1"/>
-                </a:solidFill>
-              </a:rPr>
-              <a:t>строка</a:t>
-            </a:r>
-            <a:r>
-              <a:rPr lang="en-US" altLang="en-US" sz="1400" dirty="0">
-                <a:solidFill>
-                  <a:schemeClr val="dk1"/>
-                </a:solidFill>
-              </a:rPr>
-              <a:t> — </a:t>
-            </a:r>
-            <a:r>
-              <a:rPr lang="en-US" altLang="en-US" sz="1400" dirty="0" err="1">
-                <a:solidFill>
-                  <a:schemeClr val="dk1"/>
-                </a:solidFill>
-              </a:rPr>
-              <a:t>конкретная</a:t>
-            </a:r>
-            <a:r>
-              <a:rPr lang="en-US" altLang="en-US" sz="1400" dirty="0">
-                <a:solidFill>
-                  <a:schemeClr val="dk1"/>
-                </a:solidFill>
-              </a:rPr>
-              <a:t> </a:t>
-            </a:r>
-            <a:r>
-              <a:rPr lang="en-US" altLang="en-US" sz="1400" dirty="0" err="1">
-                <a:solidFill>
-                  <a:schemeClr val="dk1"/>
-                </a:solidFill>
-              </a:rPr>
-              <a:t>проблема</a:t>
-            </a:r>
-            <a:r>
-              <a:rPr lang="en-US" altLang="en-US" sz="1400" dirty="0">
-                <a:solidFill>
-                  <a:schemeClr val="dk1"/>
-                </a:solidFill>
-              </a:rPr>
-              <a:t> с </a:t>
-            </a:r>
-            <a:r>
-              <a:rPr lang="en-US" altLang="en-US" sz="1400" dirty="0" err="1">
-                <a:solidFill>
-                  <a:schemeClr val="dk1"/>
-                </a:solidFill>
-              </a:rPr>
-              <a:t>указанием</a:t>
-            </a:r>
-            <a:r>
-              <a:rPr lang="en-US" altLang="en-US" sz="1400" dirty="0">
-                <a:solidFill>
-                  <a:schemeClr val="dk1"/>
-                </a:solidFill>
-              </a:rPr>
-              <a:t> </a:t>
-            </a:r>
-            <a:r>
-              <a:rPr lang="en-US" altLang="en-US" sz="1400" dirty="0" err="1">
-                <a:solidFill>
-                  <a:schemeClr val="dk1"/>
-                </a:solidFill>
-              </a:rPr>
-              <a:t>объекта</a:t>
-            </a:r>
-            <a:r>
-              <a:rPr lang="en-US" altLang="en-US" sz="1400" dirty="0">
-                <a:solidFill>
-                  <a:schemeClr val="dk1"/>
-                </a:solidFill>
-              </a:rPr>
-              <a:t>, </a:t>
-            </a:r>
-            <a:r>
-              <a:rPr lang="en-US" altLang="en-US" sz="1400" dirty="0" err="1">
-                <a:solidFill>
-                  <a:schemeClr val="dk1"/>
-                </a:solidFill>
-              </a:rPr>
-              <a:t>периода</a:t>
-            </a:r>
-            <a:r>
-              <a:rPr lang="en-US" altLang="en-US" sz="1400" dirty="0">
-                <a:solidFill>
-                  <a:schemeClr val="dk1"/>
-                </a:solidFill>
-              </a:rPr>
-              <a:t>, </a:t>
-            </a:r>
-            <a:r>
-              <a:rPr lang="en-US" altLang="en-US" sz="1400" dirty="0" err="1">
-                <a:solidFill>
-                  <a:schemeClr val="dk1"/>
-                </a:solidFill>
-              </a:rPr>
-              <a:t>таблицы</a:t>
-            </a:r>
-            <a:r>
-              <a:rPr lang="en-US" altLang="en-US" sz="1400" dirty="0">
-                <a:solidFill>
-                  <a:schemeClr val="dk1"/>
-                </a:solidFill>
-              </a:rPr>
-              <a:t> и </a:t>
-            </a:r>
-            <a:r>
-              <a:rPr lang="en-US" altLang="en-US" sz="1400" dirty="0" err="1">
-                <a:solidFill>
-                  <a:schemeClr val="dk1"/>
-                </a:solidFill>
-              </a:rPr>
-              <a:t>типа</a:t>
-            </a:r>
-            <a:r>
-              <a:rPr lang="en-US" altLang="en-US" sz="1400" dirty="0">
-                <a:solidFill>
-                  <a:schemeClr val="dk1"/>
-                </a:solidFill>
-              </a:rPr>
-              <a:t> </a:t>
-            </a:r>
-            <a:r>
-              <a:rPr lang="en-US" altLang="en-US" sz="1400" dirty="0" err="1">
-                <a:solidFill>
-                  <a:schemeClr val="dk1"/>
-                </a:solidFill>
-              </a:rPr>
-              <a:t>ошибки</a:t>
-            </a:r>
-            <a:r>
-              <a:rPr lang="en-US" altLang="en-US" sz="1400" dirty="0">
-                <a:solidFill>
-                  <a:schemeClr val="dk1"/>
-                </a:solidFill>
-              </a:rPr>
-              <a:t>.</a:t>
-            </a:r>
-          </a:p>
-          <a:p>
-            <a:pPr marL="171450" indent="-171450" eaLnBrk="0" fontAlgn="base" hangingPunct="0">
-              <a:spcBef>
-                <a:spcPct val="0"/>
-              </a:spcBef>
-              <a:spcAft>
-                <a:spcPct val="0"/>
-              </a:spcAft>
-              <a:buClrTx/>
-              <a:buSzTx/>
-            </a:pPr>
-            <a:r>
-              <a:rPr lang="en-US" altLang="en-US" sz="1400" dirty="0" err="1">
-                <a:solidFill>
-                  <a:schemeClr val="dk1"/>
-                </a:solidFill>
-              </a:rPr>
-              <a:t>Проверил</a:t>
-            </a:r>
-            <a:r>
-              <a:rPr lang="en-US" altLang="en-US" sz="1400" dirty="0">
-                <a:solidFill>
-                  <a:schemeClr val="dk1"/>
-                </a:solidFill>
-              </a:rPr>
-              <a:t> </a:t>
-            </a:r>
-            <a:r>
-              <a:rPr lang="en-US" altLang="en-US" sz="1400" dirty="0" err="1">
-                <a:solidFill>
-                  <a:schemeClr val="dk1"/>
-                </a:solidFill>
-              </a:rPr>
-              <a:t>работу</a:t>
-            </a:r>
-            <a:r>
-              <a:rPr lang="en-US" altLang="en-US" sz="1400" dirty="0">
-                <a:solidFill>
-                  <a:schemeClr val="dk1"/>
-                </a:solidFill>
-              </a:rPr>
-              <a:t> </a:t>
-            </a:r>
-            <a:r>
-              <a:rPr lang="en-US" altLang="en-US" sz="1400" dirty="0" err="1">
-                <a:solidFill>
-                  <a:schemeClr val="dk1"/>
-                </a:solidFill>
-              </a:rPr>
-              <a:t>на</a:t>
-            </a:r>
-            <a:r>
-              <a:rPr lang="en-US" altLang="en-US" sz="1400" dirty="0">
-                <a:solidFill>
-                  <a:schemeClr val="dk1"/>
-                </a:solidFill>
-              </a:rPr>
-              <a:t> </a:t>
-            </a:r>
-            <a:r>
-              <a:rPr lang="en-US" altLang="en-US" sz="1400" dirty="0" err="1">
-                <a:solidFill>
-                  <a:schemeClr val="dk1"/>
-                </a:solidFill>
-              </a:rPr>
-              <a:t>синтетических</a:t>
-            </a:r>
-            <a:r>
-              <a:rPr lang="en-US" altLang="en-US" sz="1400" dirty="0">
-                <a:solidFill>
-                  <a:schemeClr val="dk1"/>
-                </a:solidFill>
-              </a:rPr>
-              <a:t> и </a:t>
-            </a:r>
-            <a:r>
-              <a:rPr lang="en-US" altLang="en-US" sz="1400" dirty="0" err="1">
-                <a:solidFill>
-                  <a:schemeClr val="dk1"/>
-                </a:solidFill>
-              </a:rPr>
-              <a:t>реальных</a:t>
-            </a:r>
-            <a:r>
-              <a:rPr lang="en-US" altLang="en-US" sz="1400" dirty="0">
-                <a:solidFill>
-                  <a:schemeClr val="dk1"/>
-                </a:solidFill>
-              </a:rPr>
-              <a:t> </a:t>
-            </a:r>
-            <a:r>
-              <a:rPr lang="en-US" altLang="en-US" sz="1400" dirty="0" err="1">
-                <a:solidFill>
-                  <a:schemeClr val="dk1"/>
-                </a:solidFill>
-              </a:rPr>
-              <a:t>данных</a:t>
-            </a:r>
-            <a:r>
-              <a:rPr lang="en-US" altLang="en-US" sz="1400" dirty="0">
-                <a:solidFill>
-                  <a:schemeClr val="dk1"/>
-                </a:solidFill>
-              </a:rPr>
-              <a:t>, </a:t>
-            </a:r>
-            <a:r>
-              <a:rPr lang="en-US" altLang="en-US" sz="1400" dirty="0" err="1">
-                <a:solidFill>
-                  <a:schemeClr val="dk1"/>
-                </a:solidFill>
-              </a:rPr>
-              <a:t>построили</a:t>
-            </a:r>
-            <a:r>
-              <a:rPr lang="en-US" altLang="en-US" sz="1400" dirty="0">
-                <a:solidFill>
-                  <a:schemeClr val="dk1"/>
-                </a:solidFill>
-              </a:rPr>
-              <a:t> </a:t>
-            </a:r>
-            <a:r>
-              <a:rPr lang="en-US" altLang="en-US" sz="1400" dirty="0" err="1">
-                <a:solidFill>
-                  <a:schemeClr val="dk1"/>
-                </a:solidFill>
-              </a:rPr>
-              <a:t>агрегаты</a:t>
-            </a:r>
-            <a:r>
-              <a:rPr lang="en-US" altLang="en-US" sz="1400" dirty="0">
-                <a:solidFill>
-                  <a:schemeClr val="dk1"/>
-                </a:solidFill>
-              </a:rPr>
-              <a:t> и </a:t>
-            </a:r>
-            <a:r>
-              <a:rPr lang="en-US" altLang="en-US" sz="1400" dirty="0" err="1">
-                <a:solidFill>
-                  <a:schemeClr val="dk1"/>
-                </a:solidFill>
-              </a:rPr>
-              <a:t>визуализации</a:t>
-            </a:r>
-            <a:r>
-              <a:rPr lang="en-US" altLang="en-US" sz="1400" dirty="0">
-                <a:solidFill>
-                  <a:schemeClr val="dk1"/>
-                </a:solidFill>
-              </a:rPr>
-              <a:t>, </a:t>
-            </a:r>
-            <a:r>
-              <a:rPr lang="en-US" altLang="en-US" sz="1400" dirty="0" err="1">
-                <a:solidFill>
-                  <a:schemeClr val="dk1"/>
-                </a:solidFill>
-              </a:rPr>
-              <a:t>которые</a:t>
-            </a:r>
-            <a:r>
-              <a:rPr lang="en-US" altLang="en-US" sz="1400" dirty="0">
-                <a:solidFill>
-                  <a:schemeClr val="dk1"/>
-                </a:solidFill>
-              </a:rPr>
-              <a:t> </a:t>
-            </a:r>
-            <a:r>
-              <a:rPr lang="en-US" altLang="en-US" sz="1400" dirty="0" err="1">
-                <a:solidFill>
-                  <a:schemeClr val="dk1"/>
-                </a:solidFill>
-              </a:rPr>
-              <a:t>показывают</a:t>
-            </a:r>
-            <a:r>
-              <a:rPr lang="en-US" altLang="en-US" sz="1400" dirty="0">
-                <a:solidFill>
-                  <a:schemeClr val="dk1"/>
-                </a:solidFill>
-              </a:rPr>
-              <a:t> </a:t>
-            </a:r>
-            <a:r>
-              <a:rPr lang="en-US" altLang="en-US" sz="1400" dirty="0" err="1">
-                <a:solidFill>
-                  <a:schemeClr val="dk1"/>
-                </a:solidFill>
-              </a:rPr>
-              <a:t>распределение</a:t>
-            </a:r>
-            <a:r>
-              <a:rPr lang="en-US" altLang="en-US" sz="1400" dirty="0">
-                <a:solidFill>
-                  <a:schemeClr val="dk1"/>
-                </a:solidFill>
-              </a:rPr>
-              <a:t> </a:t>
-            </a:r>
-            <a:r>
-              <a:rPr lang="en-US" altLang="en-US" sz="1400" dirty="0" err="1">
-                <a:solidFill>
-                  <a:schemeClr val="dk1"/>
-                </a:solidFill>
-              </a:rPr>
-              <a:t>ошибок</a:t>
-            </a:r>
-            <a:r>
-              <a:rPr lang="en-US" altLang="en-US" sz="1400" dirty="0">
-                <a:solidFill>
-                  <a:schemeClr val="dk1"/>
-                </a:solidFill>
-              </a:rPr>
-              <a:t> </a:t>
-            </a:r>
-            <a:r>
-              <a:rPr lang="en-US" altLang="en-US" sz="1400" dirty="0" err="1">
-                <a:solidFill>
-                  <a:schemeClr val="dk1"/>
-                </a:solidFill>
-              </a:rPr>
-              <a:t>по</a:t>
-            </a:r>
-            <a:r>
-              <a:rPr lang="en-US" altLang="en-US" sz="1400" dirty="0">
-                <a:solidFill>
-                  <a:schemeClr val="dk1"/>
-                </a:solidFill>
-              </a:rPr>
-              <a:t> </a:t>
-            </a:r>
-            <a:r>
-              <a:rPr lang="en-US" altLang="en-US" sz="1400" dirty="0" err="1">
-                <a:solidFill>
-                  <a:schemeClr val="dk1"/>
-                </a:solidFill>
-              </a:rPr>
-              <a:t>таблицам</a:t>
-            </a:r>
-            <a:r>
-              <a:rPr lang="en-US" altLang="en-US" sz="1400" dirty="0">
-                <a:solidFill>
-                  <a:schemeClr val="dk1"/>
-                </a:solidFill>
-              </a:rPr>
-              <a:t> и </a:t>
-            </a:r>
-            <a:r>
-              <a:rPr lang="en-US" altLang="en-US" sz="1400" dirty="0" err="1">
-                <a:solidFill>
-                  <a:schemeClr val="dk1"/>
-                </a:solidFill>
-              </a:rPr>
-              <a:t>типам</a:t>
-            </a:r>
-            <a:r>
-              <a:rPr lang="en-US" altLang="en-US" sz="1400" dirty="0">
-                <a:solidFill>
-                  <a:schemeClr val="dk1"/>
-                </a:solidFill>
-              </a:rPr>
-              <a:t> и </a:t>
-            </a:r>
-            <a:r>
-              <a:rPr lang="en-US" altLang="en-US" sz="1400" dirty="0" err="1">
-                <a:solidFill>
-                  <a:schemeClr val="dk1"/>
-                </a:solidFill>
-              </a:rPr>
-              <a:t>позволяют</a:t>
-            </a:r>
-            <a:r>
-              <a:rPr lang="en-US" altLang="en-US" sz="1400" dirty="0">
-                <a:solidFill>
-                  <a:schemeClr val="dk1"/>
-                </a:solidFill>
-              </a:rPr>
-              <a:t> </a:t>
-            </a:r>
-            <a:r>
-              <a:rPr lang="en-US" altLang="en-US" sz="1400" dirty="0" err="1">
-                <a:solidFill>
-                  <a:schemeClr val="dk1"/>
-                </a:solidFill>
-              </a:rPr>
-              <a:t>быстро</a:t>
-            </a:r>
-            <a:r>
-              <a:rPr lang="en-US" altLang="en-US" sz="1400" dirty="0">
-                <a:solidFill>
-                  <a:schemeClr val="dk1"/>
-                </a:solidFill>
-              </a:rPr>
-              <a:t> </a:t>
-            </a:r>
-            <a:r>
-              <a:rPr lang="en-US" altLang="en-US" sz="1400" dirty="0" err="1">
-                <a:solidFill>
-                  <a:schemeClr val="dk1"/>
-                </a:solidFill>
-              </a:rPr>
-              <a:t>оценить</a:t>
-            </a:r>
-            <a:r>
-              <a:rPr lang="en-US" altLang="en-US" sz="1400" dirty="0">
-                <a:solidFill>
-                  <a:schemeClr val="dk1"/>
-                </a:solidFill>
-              </a:rPr>
-              <a:t> “</a:t>
-            </a:r>
-            <a:r>
-              <a:rPr lang="en-US" altLang="en-US" sz="1400" dirty="0" err="1">
-                <a:solidFill>
-                  <a:schemeClr val="dk1"/>
-                </a:solidFill>
-              </a:rPr>
-              <a:t>здоровье</a:t>
-            </a:r>
-            <a:r>
-              <a:rPr lang="en-US" altLang="en-US" sz="1400" dirty="0">
-                <a:solidFill>
-                  <a:schemeClr val="dk1"/>
-                </a:solidFill>
-              </a:rPr>
-              <a:t>” </a:t>
-            </a:r>
-            <a:r>
-              <a:rPr lang="en-US" altLang="en-US" sz="1400" dirty="0" err="1">
-                <a:solidFill>
-                  <a:schemeClr val="dk1"/>
-                </a:solidFill>
-              </a:rPr>
-              <a:t>датасета</a:t>
-            </a:r>
-            <a:r>
-              <a:rPr lang="en-US" altLang="en-US" sz="1400" dirty="0">
-                <a:solidFill>
-                  <a:schemeClr val="dk1"/>
-                </a:solidFill>
-              </a:rPr>
-              <a:t> </a:t>
-            </a:r>
-            <a:r>
-              <a:rPr lang="en-US" altLang="en-US" sz="1400" dirty="0" err="1">
-                <a:solidFill>
-                  <a:schemeClr val="dk1"/>
-                </a:solidFill>
-              </a:rPr>
-              <a:t>перед</a:t>
-            </a:r>
-            <a:r>
-              <a:rPr lang="en-US" altLang="en-US" sz="1400" dirty="0">
-                <a:solidFill>
-                  <a:schemeClr val="dk1"/>
-                </a:solidFill>
-              </a:rPr>
-              <a:t> </a:t>
-            </a:r>
-            <a:r>
-              <a:rPr lang="en-US" altLang="en-US" sz="1400" dirty="0" err="1">
-                <a:solidFill>
-                  <a:schemeClr val="dk1"/>
-                </a:solidFill>
-              </a:rPr>
-              <a:t>обучением</a:t>
-            </a:r>
-            <a:r>
-              <a:rPr lang="en-US" altLang="en-US" sz="1400" dirty="0">
-                <a:solidFill>
-                  <a:schemeClr val="dk1"/>
-                </a:solidFill>
-              </a:rPr>
-              <a:t> </a:t>
-            </a:r>
-            <a:r>
-              <a:rPr lang="en-US" altLang="en-US" sz="1400" dirty="0" err="1">
-                <a:solidFill>
-                  <a:schemeClr val="dk1"/>
-                </a:solidFill>
-              </a:rPr>
-              <a:t>моделей</a:t>
-            </a:r>
-            <a:r>
-              <a:rPr lang="en-US" altLang="en-US" sz="1400" dirty="0">
-                <a:solidFill>
-                  <a:schemeClr val="dk1"/>
-                </a:solidFill>
-              </a:rPr>
-              <a:t>.</a:t>
-            </a:r>
-          </a:p>
-          <a:p>
-            <a:pPr marL="0" marR="0" lvl="0" indent="0" algn="l" defTabSz="914400" rtl="0" eaLnBrk="0" fontAlgn="base" latinLnBrk="0" hangingPunct="0">
-              <a:lnSpc>
-                <a:spcPct val="100000"/>
-              </a:lnSpc>
-              <a:spcBef>
-                <a:spcPct val="0"/>
-              </a:spcBef>
-              <a:spcAft>
-                <a:spcPct val="0"/>
-              </a:spcAft>
-              <a:buClrTx/>
-              <a:buSzTx/>
-              <a:buFontTx/>
-              <a:buNone/>
-              <a:tabLst/>
-            </a:pPr>
-            <a:r>
-              <a:rPr lang="en-US" altLang="en-US" sz="1400" b="1" dirty="0" err="1">
-                <a:solidFill>
-                  <a:schemeClr val="dk1"/>
-                </a:solidFill>
-              </a:rPr>
-              <a:t>Как</a:t>
-            </a:r>
-            <a:r>
-              <a:rPr lang="en-US" altLang="en-US" sz="1400" b="1" dirty="0">
-                <a:solidFill>
-                  <a:schemeClr val="dk1"/>
-                </a:solidFill>
-              </a:rPr>
-              <a:t> </a:t>
-            </a:r>
-            <a:r>
-              <a:rPr lang="en-US" altLang="en-US" sz="1400" b="1" dirty="0" err="1">
-                <a:solidFill>
-                  <a:schemeClr val="dk1"/>
-                </a:solidFill>
-              </a:rPr>
-              <a:t>можно</a:t>
-            </a:r>
-            <a:r>
-              <a:rPr lang="en-US" altLang="en-US" sz="1400" b="1" dirty="0">
-                <a:solidFill>
-                  <a:schemeClr val="dk1"/>
-                </a:solidFill>
-              </a:rPr>
-              <a:t> </a:t>
-            </a:r>
-            <a:r>
-              <a:rPr lang="en-US" altLang="en-US" sz="1400" b="1" dirty="0" err="1">
-                <a:solidFill>
-                  <a:schemeClr val="dk1"/>
-                </a:solidFill>
-              </a:rPr>
-              <a:t>улучшить</a:t>
-            </a:r>
-            <a:r>
-              <a:rPr lang="en-US" altLang="en-US" sz="1400" b="1" dirty="0">
-                <a:solidFill>
-                  <a:schemeClr val="dk1"/>
-                </a:solidFill>
-              </a:rPr>
-              <a:t> </a:t>
-            </a:r>
-            <a:r>
-              <a:rPr lang="en-US" altLang="en-US" sz="1400" b="1" dirty="0" err="1">
-                <a:solidFill>
-                  <a:schemeClr val="dk1"/>
-                </a:solidFill>
-              </a:rPr>
-              <a:t>результат</a:t>
-            </a:r>
-            <a:endParaRPr lang="en-US" altLang="en-US" sz="1400" b="1" dirty="0">
-              <a:solidFill>
-                <a:schemeClr val="dk1"/>
-              </a:solidFill>
-            </a:endParaRPr>
-          </a:p>
-          <a:p>
-            <a:pPr marL="171450" indent="-171450" eaLnBrk="0" fontAlgn="base" hangingPunct="0">
-              <a:spcBef>
-                <a:spcPct val="0"/>
-              </a:spcBef>
-              <a:spcAft>
-                <a:spcPct val="0"/>
-              </a:spcAft>
-              <a:buClrTx/>
-              <a:buSzTx/>
-            </a:pPr>
-            <a:r>
-              <a:rPr lang="en-US" altLang="en-US" sz="1400" dirty="0" err="1">
-                <a:solidFill>
-                  <a:schemeClr val="dk1"/>
-                </a:solidFill>
-              </a:rPr>
-              <a:t>Добавить</a:t>
-            </a:r>
-            <a:r>
-              <a:rPr lang="en-US" altLang="en-US" sz="1400" dirty="0">
-                <a:solidFill>
-                  <a:schemeClr val="dk1"/>
-                </a:solidFill>
-              </a:rPr>
-              <a:t> </a:t>
-            </a:r>
-            <a:r>
-              <a:rPr lang="en-US" altLang="en-US" sz="1400" dirty="0" err="1">
-                <a:solidFill>
-                  <a:schemeClr val="dk1"/>
-                </a:solidFill>
-              </a:rPr>
-              <a:t>бизнес-правила</a:t>
-            </a:r>
-            <a:r>
-              <a:rPr lang="en-US" altLang="en-US" sz="1400" dirty="0">
-                <a:solidFill>
-                  <a:schemeClr val="dk1"/>
-                </a:solidFill>
-              </a:rPr>
-              <a:t> DQ (</a:t>
-            </a:r>
-            <a:r>
-              <a:rPr lang="en-US" altLang="en-US" sz="1400" dirty="0" err="1">
-                <a:solidFill>
-                  <a:schemeClr val="dk1"/>
-                </a:solidFill>
-              </a:rPr>
-              <a:t>пороги</a:t>
-            </a:r>
-            <a:r>
-              <a:rPr lang="en-US" altLang="en-US" sz="1400" dirty="0">
-                <a:solidFill>
-                  <a:schemeClr val="dk1"/>
-                </a:solidFill>
-              </a:rPr>
-              <a:t> </a:t>
-            </a:r>
-            <a:r>
-              <a:rPr lang="en-US" altLang="en-US" sz="1400" dirty="0" err="1">
-                <a:solidFill>
-                  <a:schemeClr val="dk1"/>
-                </a:solidFill>
-              </a:rPr>
-              <a:t>по</a:t>
-            </a:r>
-            <a:r>
-              <a:rPr lang="en-US" altLang="en-US" sz="1400" dirty="0">
-                <a:solidFill>
-                  <a:schemeClr val="dk1"/>
-                </a:solidFill>
-              </a:rPr>
-              <a:t> </a:t>
-            </a:r>
-            <a:r>
-              <a:rPr lang="en-US" altLang="en-US" sz="1400" dirty="0" err="1">
-                <a:solidFill>
-                  <a:schemeClr val="dk1"/>
-                </a:solidFill>
-              </a:rPr>
-              <a:t>продажам</a:t>
-            </a:r>
-            <a:r>
-              <a:rPr lang="en-US" altLang="en-US" sz="1400" dirty="0">
-                <a:solidFill>
-                  <a:schemeClr val="dk1"/>
-                </a:solidFill>
-              </a:rPr>
-              <a:t>/</a:t>
-            </a:r>
-            <a:r>
-              <a:rPr lang="en-US" altLang="en-US" sz="1400" dirty="0" err="1">
-                <a:solidFill>
-                  <a:schemeClr val="dk1"/>
-                </a:solidFill>
-              </a:rPr>
-              <a:t>ценам</a:t>
-            </a:r>
-            <a:r>
-              <a:rPr lang="en-US" altLang="en-US" sz="1400" dirty="0">
-                <a:solidFill>
-                  <a:schemeClr val="dk1"/>
-                </a:solidFill>
-              </a:rPr>
-              <a:t>, </a:t>
-            </a:r>
-            <a:r>
-              <a:rPr lang="en-US" altLang="en-US" sz="1400" dirty="0" err="1">
-                <a:solidFill>
-                  <a:schemeClr val="dk1"/>
-                </a:solidFill>
-              </a:rPr>
-              <a:t>аномальные</a:t>
-            </a:r>
-            <a:r>
-              <a:rPr lang="en-US" altLang="en-US" sz="1400" dirty="0">
-                <a:solidFill>
-                  <a:schemeClr val="dk1"/>
-                </a:solidFill>
-              </a:rPr>
-              <a:t> </a:t>
-            </a:r>
-            <a:r>
-              <a:rPr lang="ru-RU" altLang="en-US" sz="1400" dirty="0">
-                <a:solidFill>
-                  <a:schemeClr val="dk1"/>
-                </a:solidFill>
-              </a:rPr>
-              <a:t>значения-скачки</a:t>
-            </a:r>
-            <a:r>
-              <a:rPr lang="en-US" altLang="en-US" sz="1400" dirty="0">
-                <a:solidFill>
-                  <a:schemeClr val="dk1"/>
-                </a:solidFill>
-              </a:rPr>
-              <a:t>).</a:t>
-            </a:r>
-          </a:p>
-          <a:p>
-            <a:pPr marL="171450" indent="-171450" eaLnBrk="0" fontAlgn="base" hangingPunct="0">
-              <a:spcBef>
-                <a:spcPct val="0"/>
-              </a:spcBef>
-              <a:spcAft>
-                <a:spcPct val="0"/>
-              </a:spcAft>
-              <a:buClrTx/>
-              <a:buSzTx/>
-            </a:pPr>
-            <a:r>
-              <a:rPr lang="en-US" altLang="en-US" sz="1400" dirty="0" err="1">
-                <a:solidFill>
-                  <a:schemeClr val="dk1"/>
-                </a:solidFill>
-              </a:rPr>
-              <a:t>Вынести</a:t>
-            </a:r>
-            <a:r>
-              <a:rPr lang="en-US" altLang="en-US" sz="1400" dirty="0">
-                <a:solidFill>
-                  <a:schemeClr val="dk1"/>
-                </a:solidFill>
-              </a:rPr>
-              <a:t> </a:t>
-            </a:r>
-            <a:r>
-              <a:rPr lang="en-US" altLang="en-US" sz="1400" dirty="0" err="1">
-                <a:solidFill>
-                  <a:schemeClr val="dk1"/>
-                </a:solidFill>
-              </a:rPr>
-              <a:t>все</a:t>
-            </a:r>
-            <a:r>
-              <a:rPr lang="en-US" altLang="en-US" sz="1400" dirty="0">
-                <a:solidFill>
-                  <a:schemeClr val="dk1"/>
-                </a:solidFill>
-              </a:rPr>
-              <a:t> </a:t>
-            </a:r>
-            <a:r>
-              <a:rPr lang="en-US" altLang="en-US" sz="1400" dirty="0" err="1">
-                <a:solidFill>
-                  <a:schemeClr val="dk1"/>
-                </a:solidFill>
-              </a:rPr>
-              <a:t>пороги</a:t>
-            </a:r>
-            <a:r>
-              <a:rPr lang="en-US" altLang="en-US" sz="1400" dirty="0">
-                <a:solidFill>
-                  <a:schemeClr val="dk1"/>
-                </a:solidFill>
-              </a:rPr>
-              <a:t> и </a:t>
-            </a:r>
-            <a:r>
-              <a:rPr lang="en-US" altLang="en-US" sz="1400" dirty="0" err="1">
-                <a:solidFill>
-                  <a:schemeClr val="dk1"/>
-                </a:solidFill>
-              </a:rPr>
-              <a:t>настройки</a:t>
-            </a:r>
-            <a:r>
-              <a:rPr lang="en-US" altLang="en-US" sz="1400" dirty="0">
-                <a:solidFill>
-                  <a:schemeClr val="dk1"/>
-                </a:solidFill>
-              </a:rPr>
-              <a:t> в </a:t>
-            </a:r>
-            <a:r>
-              <a:rPr lang="en-US" altLang="en-US" sz="1400" dirty="0" err="1">
-                <a:solidFill>
-                  <a:schemeClr val="dk1"/>
-                </a:solidFill>
-              </a:rPr>
-              <a:t>конфигурацию</a:t>
-            </a:r>
-            <a:r>
-              <a:rPr lang="en-US" altLang="en-US" sz="1400" dirty="0">
-                <a:solidFill>
-                  <a:schemeClr val="dk1"/>
-                </a:solidFill>
-              </a:rPr>
-              <a:t> (DQ_PARAMETERS) и </a:t>
-            </a:r>
-            <a:r>
-              <a:rPr lang="en-US" altLang="en-US" sz="1400" dirty="0" err="1">
-                <a:solidFill>
-                  <a:schemeClr val="dk1"/>
-                </a:solidFill>
-              </a:rPr>
-              <a:t>сделать</a:t>
-            </a:r>
-            <a:r>
-              <a:rPr lang="en-US" altLang="en-US" sz="1400" dirty="0">
-                <a:solidFill>
-                  <a:schemeClr val="dk1"/>
-                </a:solidFill>
-              </a:rPr>
-              <a:t> </a:t>
-            </a:r>
-            <a:r>
-              <a:rPr lang="en-US" altLang="en-US" sz="1400" dirty="0" err="1">
-                <a:solidFill>
-                  <a:schemeClr val="dk1"/>
-                </a:solidFill>
-              </a:rPr>
-              <a:t>шаг</a:t>
-            </a:r>
-            <a:r>
-              <a:rPr lang="en-US" altLang="en-US" sz="1400" dirty="0">
-                <a:solidFill>
-                  <a:schemeClr val="dk1"/>
-                </a:solidFill>
-              </a:rPr>
-              <a:t> </a:t>
-            </a:r>
-            <a:r>
-              <a:rPr lang="en-US" altLang="en-US" sz="1400" dirty="0" err="1">
-                <a:solidFill>
-                  <a:schemeClr val="dk1"/>
-                </a:solidFill>
-              </a:rPr>
-              <a:t>полностью</a:t>
-            </a:r>
-            <a:r>
-              <a:rPr lang="en-US" altLang="en-US" sz="1400" dirty="0">
-                <a:solidFill>
-                  <a:schemeClr val="dk1"/>
-                </a:solidFill>
-              </a:rPr>
-              <a:t> </a:t>
-            </a:r>
-            <a:r>
-              <a:rPr lang="en-US" altLang="en-US" sz="1400" dirty="0" err="1">
-                <a:solidFill>
-                  <a:schemeClr val="dk1"/>
-                </a:solidFill>
-              </a:rPr>
-              <a:t>управляемым</a:t>
-            </a:r>
-            <a:r>
-              <a:rPr lang="en-US" altLang="en-US" sz="1400" dirty="0">
-                <a:solidFill>
-                  <a:schemeClr val="dk1"/>
-                </a:solidFill>
-              </a:rPr>
-              <a:t> </a:t>
-            </a:r>
-            <a:r>
-              <a:rPr lang="en-US" altLang="en-US" sz="1400" dirty="0" err="1">
-                <a:solidFill>
-                  <a:schemeClr val="dk1"/>
-                </a:solidFill>
-              </a:rPr>
-              <a:t>без</a:t>
-            </a:r>
-            <a:r>
-              <a:rPr lang="en-US" altLang="en-US" sz="1400" dirty="0">
-                <a:solidFill>
-                  <a:schemeClr val="dk1"/>
-                </a:solidFill>
-              </a:rPr>
-              <a:t> </a:t>
-            </a:r>
-            <a:r>
-              <a:rPr lang="en-US" altLang="en-US" sz="1400" dirty="0" err="1">
-                <a:solidFill>
-                  <a:schemeClr val="dk1"/>
-                </a:solidFill>
-              </a:rPr>
-              <a:t>изменения</a:t>
-            </a:r>
-            <a:r>
-              <a:rPr lang="en-US" altLang="en-US" sz="1400" dirty="0">
-                <a:solidFill>
-                  <a:schemeClr val="dk1"/>
-                </a:solidFill>
-              </a:rPr>
-              <a:t> </a:t>
-            </a:r>
-            <a:r>
-              <a:rPr lang="en-US" altLang="en-US" sz="1400" dirty="0" err="1">
-                <a:solidFill>
-                  <a:schemeClr val="dk1"/>
-                </a:solidFill>
-              </a:rPr>
-              <a:t>кода</a:t>
-            </a:r>
-            <a:r>
-              <a:rPr lang="en-US" altLang="en-US" sz="1400" dirty="0">
-                <a:solidFill>
-                  <a:schemeClr val="dk1"/>
-                </a:solidFill>
-              </a:rPr>
-              <a:t>.</a:t>
+              <a:rPr lang="en-US" sz="1400" dirty="0"/>
+              <a:t>Move all thresholds and settings into a configuration table (DQ_PARAMETERS) and make the step fully configurable without code changes.</a:t>
             </a:r>
           </a:p>
         </p:txBody>
@@ -15007,8 +12631,8 @@
           <a:p>
             <a:pPr lvl="0"/>
             <a:r>
-              <a:rPr lang="en" sz="4000" dirty="0"/>
-              <a:t>Разработка e2e пайплайна прогнозирования спроса в ритейле</a:t>
+              <a:rPr lang="en-US" sz="4000" dirty="0"/>
+              <a:t>Development of an end-to-end demand forecasting pipeline for retail</a:t>
             </a:r>
             <a:endParaRPr sz="4000" dirty="0"/>
           </a:p>
@@ -15402,7 +13026,7 @@
         <p:spPr>
           <a:xfrm>
             <a:off x="609748" y="2808023"/>
-            <a:ext cx="3513865" cy="1569660"/>
+            <a:ext cx="3513865" cy="1754326"/>
           </a:xfrm>
           <a:prstGeom prst="rect">
             <a:avLst/>
@@ -15416,86 +13040,42 @@
           <a:lstStyle/>
           <a:p>
             <a:r>
-              <a:rPr lang="ru-RU" sz="800" b="1" dirty="0">
-                <a:solidFill>
-                  <a:schemeClr val="tx1"/>
-                </a:solidFill>
-                <a:latin typeface="Montserrat" panose="00000500000000000000" pitchFamily="2" charset="-52"/>
-                <a:cs typeface="Mongolian Baiti" panose="03000500000000000000" pitchFamily="66" charset="0"/>
-              </a:rPr>
-              <a:t>Что делает и зачем:</a:t>
+              <a:rPr lang="en-US" sz="1000" b="1" dirty="0"/>
+              <a:t>What it does and why:</a:t>
             </a:r>
-          </a:p>
-          <a:p>
-            <a:pPr marL="171450" indent="-171450">
-              <a:buFont typeface="Arial" panose="020B0604020202020204" pitchFamily="34" charset="0"/>
-              <a:buChar char="•"/>
-            </a:pPr>
+            <a:br>
+              <a:rPr lang="en-US" sz="1000" dirty="0"/>
+            </a:br>
             <a:r>
-              <a:rPr lang="ru-RU" sz="800" dirty="0">
-                <a:solidFill>
-                  <a:schemeClr val="tx1"/>
-                </a:solidFill>
-                <a:latin typeface="Montserrat" panose="00000500000000000000" pitchFamily="2" charset="-52"/>
-                <a:cs typeface="Mongolian Baiti" panose="03000500000000000000" pitchFamily="66" charset="0"/>
-              </a:rPr>
-              <a:t>Проверяет, отличается ли текущая временная гранулярность прогноза от целевой.</a:t>
+              <a:rPr lang="en-US" sz="1000" dirty="0"/>
+              <a:t>Checks whether the current forecast time granularity differs from the target one.</a:t>
             </a:r>
-          </a:p>
-          <a:p>
-            <a:pPr marL="171450" indent="-171450">
-              <a:buFont typeface="Arial" panose="020B0604020202020204" pitchFamily="34" charset="0"/>
-              <a:buChar char="•"/>
-            </a:pPr>
+            <a:br>
+              <a:rPr lang="en-US" sz="1000" dirty="0"/>
+            </a:br>
             <a:r>
-              <a:rPr lang="ru-RU" sz="800" dirty="0">
-                <a:solidFill>
-                  <a:schemeClr val="tx1"/>
-                </a:solidFill>
-                <a:latin typeface="Montserrat" panose="00000500000000000000" pitchFamily="2" charset="-52"/>
-                <a:cs typeface="Mongolian Baiti" panose="03000500000000000000" pitchFamily="66" charset="0"/>
-              </a:rPr>
-              <a:t>Если отличается - режет интервалы на дни или недели.</a:t>
+              <a:rPr lang="en-US" sz="1000" dirty="0"/>
+              <a:t>If it differs, splits intervals into days or weeks.</a:t>
             </a:r>
-          </a:p>
-          <a:p>
-            <a:pPr marL="171450" indent="-171450">
-              <a:buFont typeface="Arial" panose="020B0604020202020204" pitchFamily="34" charset="0"/>
-              <a:buChar char="•"/>
-            </a:pPr>
+            <a:br>
+              <a:rPr lang="en-US" sz="1000" dirty="0"/>
+            </a:br>
             <a:r>
-              <a:rPr lang="ru-RU" sz="800" dirty="0">
-                <a:solidFill>
-                  <a:schemeClr val="tx1"/>
-                </a:solidFill>
-                <a:latin typeface="Montserrat" panose="00000500000000000000" pitchFamily="2" charset="-52"/>
-                <a:cs typeface="Mongolian Baiti" panose="03000500000000000000" pitchFamily="66" charset="0"/>
-              </a:rPr>
-              <a:t>Перераспределяет значения прогноза пропорционально количеству дней в каждом новом интервале, сохраняя общий объём.</a:t>
+              <a:rPr lang="en-US" sz="1000" dirty="0"/>
+              <a:t>Redistributes forecast values proportionally to the number of days in each new interval, preserving the total volume.</a:t>
             </a:r>
           </a:p>
           <a:p>
             <a:r>
-              <a:rPr lang="ru-RU" sz="800" b="1" dirty="0">
-                <a:solidFill>
-                  <a:schemeClr val="tx1"/>
-                </a:solidFill>
-                <a:latin typeface="Montserrat" panose="00000500000000000000" pitchFamily="2" charset="-52"/>
-                <a:cs typeface="Mongolian Baiti" panose="03000500000000000000" pitchFamily="66" charset="0"/>
-              </a:rPr>
-              <a:t>Зачем нужно:</a:t>
+              <a:rPr lang="en-US" sz="1000" b="1" dirty="0"/>
+              <a:t>Why it’s needed:</a:t>
             </a:r>
-          </a:p>
-          <a:p>
+            <a:br>
+              <a:rPr lang="en-US" sz="1000" dirty="0"/>
+            </a:br>
             <a:r>
-              <a:rPr lang="ru-RU" sz="800" dirty="0">
-                <a:solidFill>
-                  <a:schemeClr val="tx1"/>
-                </a:solidFill>
-                <a:latin typeface="Montserrat" panose="00000500000000000000" pitchFamily="2" charset="-52"/>
-                <a:cs typeface="Mongolian Baiti" panose="03000500000000000000" pitchFamily="66" charset="0"/>
-              </a:rPr>
-              <a:t>Чтобы получить прогноз в той временной детализации, в которой работают дальнейшие шаги без потери и искажения исходного объёма прогноза.</a:t>
+              <a:rPr lang="en-US" sz="1000" dirty="0"/>
+              <a:t>To produce a forecast at the time resolution required by downstream steps, without losing or distorting the original forecast volume.</a:t>
             </a:r>
           </a:p>
           <a:p>
@@ -15540,20 +13120,16 @@
           </a:bodyPr>
           <a:lstStyle/>
           <a:p>
-            <a:pPr marL="0" lvl="0" indent="0" algn="l" rtl="0">
-              <a:spcBef>
-                <a:spcPts val="0"/>
-              </a:spcBef>
-              <a:spcAft>
-                <a:spcPts val="0"/>
-              </a:spcAft>
-              <a:buNone/>
-            </a:pPr>
+            <a:pPr lvl="0" algn="l"/>
             <a:r>
-              <a:rPr lang="en" dirty="0">
-                <a:latin typeface="Montserrat" panose="00000500000000000000" pitchFamily="2" charset="-52"/>
+              <a:rPr lang="en-US" sz="3200" dirty="0">
+                <a:solidFill>
+                  <a:schemeClr val="dk2"/>
+                </a:solidFill>
+                <a:latin typeface="Montserrat"/>
+                <a:sym typeface="Montserrat"/>
               </a:rPr>
-              <a:t>e2e процесс прогнзировния спроса</a:t>
+              <a:t>end-to-end demand forecasting process</a:t>
             </a:r>
             <a:endParaRPr dirty="0">
               <a:latin typeface="Montserrat" panose="00000500000000000000" pitchFamily="2" charset="-52"/>
@@ -15632,8 +13208,8 @@
               <a:buSzPts val="1100"/>
             </a:pPr>
             <a:r>
-              <a:rPr lang="en" dirty="0"/>
-              <a:t>Данные на входе шага</a:t>
+              <a:rPr lang="en-US" dirty="0"/>
+              <a:t>Input data for the step</a:t>
             </a:r>
             <a:endParaRPr dirty="0"/>
           </a:p>
@@ -15698,7 +13274,7 @@
         <p:spPr>
           <a:xfrm>
             <a:off x="5038975" y="2961200"/>
-            <a:ext cx="2053803" cy="902100"/>
+            <a:ext cx="3133475" cy="902100"/>
           </a:xfrm>
           <a:prstGeom prst="rect">
             <a:avLst/>
@@ -15711,21 +13287,9 @@
           <a:lstStyle/>
           <a:p>
             <a:r>
-              <a:rPr lang="ru-RU" dirty="0"/>
-              <a:t>DAY или WEEK.2, который задаёт целевую временную гранулярность</a:t>
+              <a:rPr lang="en-US" sz="1800" dirty="0"/>
+              <a:t>DAY or WEEK.2, which defines the target time granularity</a:t>
             </a:r>
-          </a:p>
-          <a:p>
-            <a:pPr marL="0" lvl="0" indent="0" algn="ctr" rtl="0">
-              <a:spcBef>
-                <a:spcPts val="0"/>
-              </a:spcBef>
-              <a:spcAft>
-                <a:spcPts val="0"/>
-              </a:spcAft>
-              <a:buNone/>
-            </a:pPr>
-            <a:endParaRPr dirty="0"/>
           </a:p>
         </p:txBody>
       </p:sp>
@@ -15804,107 +13368,30 @@
           </a:bodyPr>
           <a:lstStyle/>
           <a:p>
-            <a:pPr marL="742950" lvl="1" indent="-285750" algn="l" eaLnBrk="0" fontAlgn="base" hangingPunct="0">
-              <a:lnSpc>
-                <a:spcPct val="100000"/>
-              </a:lnSpc>
-              <a:spcBef>
-                <a:spcPct val="0"/>
-              </a:spcBef>
-              <a:spcAft>
-                <a:spcPct val="0"/>
-              </a:spcAft>
-              <a:buClrTx/>
-              <a:buSzTx/>
-              <a:buFont typeface="Arial" panose="020B0604020202020204" pitchFamily="34" charset="0"/>
-              <a:buChar char="•"/>
-            </a:pPr>
+            <a:pPr marL="0" indent="0"/>
             <a:r>
-              <a:rPr lang="en-US" altLang="en-US" sz="1100" dirty="0" err="1"/>
-              <a:t>ключи</a:t>
-            </a:r>
-            <a:endParaRPr lang="en-US" altLang="en-US" sz="1100" dirty="0"/>
-          </a:p>
-          <a:p>
-            <a:pPr marL="742950" lvl="1" indent="-285750" algn="l" eaLnBrk="0" fontAlgn="base" hangingPunct="0">
-              <a:lnSpc>
-                <a:spcPct val="100000"/>
-              </a:lnSpc>
-              <a:spcBef>
-                <a:spcPct val="0"/>
-              </a:spcBef>
-              <a:spcAft>
-                <a:spcPct val="0"/>
-              </a:spcAft>
-              <a:buClrTx/>
-              <a:buSzTx/>
-              <a:buFont typeface="Arial" panose="020B0604020202020204" pitchFamily="34" charset="0"/>
-              <a:buChar char="•"/>
-            </a:pPr>
-            <a:r>
-              <a:rPr lang="en-US" altLang="en-US" sz="1100" dirty="0" err="1"/>
-              <a:t>время</a:t>
-            </a:r>
-            <a:r>
-              <a:rPr lang="en-US" altLang="en-US" sz="1100" dirty="0"/>
-              <a:t>: </a:t>
-            </a:r>
-            <a:r>
-              <a:rPr lang="en-US" altLang="en-US" sz="1100" dirty="0" err="1"/>
-              <a:t>интервал</a:t>
-            </a:r>
-            <a:r>
-              <a:rPr lang="en-US" altLang="en-US" sz="1100" dirty="0"/>
-              <a:t> PERIOD_DT–PERIOD_END_DT (</a:t>
-            </a:r>
-            <a:r>
-              <a:rPr lang="en-US" altLang="en-US" sz="1100" dirty="0" err="1"/>
-              <a:t>обычно</a:t>
-            </a:r>
-            <a:r>
-              <a:rPr lang="en-US" altLang="en-US" sz="1100" dirty="0"/>
-              <a:t> </a:t>
-            </a:r>
-            <a:r>
-              <a:rPr lang="en-US" altLang="en-US" sz="1100" dirty="0" err="1"/>
-              <a:t>месяц</a:t>
-            </a:r>
-            <a:r>
-              <a:rPr lang="en-US" altLang="en-US" sz="1100" dirty="0"/>
-              <a:t>)</a:t>
+              <a:rPr lang="en-US" dirty="0"/>
+              <a:t>Keys</a:t>
             </a:r>
           </a:p>
           <a:p>
-            <a:pPr marL="742950" lvl="1" indent="-285750" algn="l" eaLnBrk="0" fontAlgn="base" hangingPunct="0">
-              <a:lnSpc>
-                <a:spcPct val="100000"/>
-              </a:lnSpc>
-              <a:spcBef>
-                <a:spcPct val="0"/>
-              </a:spcBef>
-              <a:spcAft>
-                <a:spcPct val="0"/>
-              </a:spcAft>
-              <a:buClrTx/>
-              <a:buSzTx/>
-              <a:buFont typeface="Arial" panose="020B0604020202020204" pitchFamily="34" charset="0"/>
-              <a:buChar char="•"/>
-            </a:pPr>
+            <a:pPr marL="0" indent="0"/>
+            <a:br>
+              <a:rPr lang="en-US" dirty="0"/>
+            </a:br>
             <a:r>
-              <a:rPr lang="en-US" altLang="en-US" sz="1100" dirty="0" err="1"/>
-              <a:t>значения</a:t>
+              <a:rPr lang="en-US" dirty="0"/>
+              <a:t>time: PERIOD_DT–PERIOD_END_DT interval (usually a month)</a:t>
             </a:r>
+          </a:p>
+          <a:p>
+            <a:pPr marL="0" indent="0"/>
+            <a:br>
+              <a:rPr lang="en-US" dirty="0"/>
+            </a:br>
             <a:r>
-              <a:rPr lang="en-US" altLang="en-US" sz="1100" dirty="0"/>
-              <a:t> </a:t>
-            </a:r>
-            <a:r>
-              <a:rPr lang="en-US" altLang="en-US" sz="1100" dirty="0" err="1"/>
-              <a:t>прогноза</a:t>
-            </a:r>
-            <a:r>
-              <a:rPr lang="en-US" altLang="en-US" sz="1100" dirty="0"/>
-              <a:t>: VF_FORECAST_VALUE, ML_FORECAST_VALUE, HYBRID_FORECAST_VALUE</a:t>
+              <a:rPr lang="en-US" dirty="0"/>
+              <a:t>forecast values: VF_FORECAST_VALUE, ML_FORECAST_VALUE, HYBRID_FORECAST_VALUE</a:t>
             </a:r>
           </a:p>
           <a:p>
